--- a/public/assets/editable/professional-logo-design-sales-presentation-2/pt/Professional Logo Design Sales Presentation - pt.pptx
+++ b/public/assets/editable/professional-logo-design-sales-presentation-2/pt/Professional Logo Design Sales Presentation - pt.pptx
@@ -2030,16 +2030,59 @@
         <p:spPr>
           <a:xfrm>
             <a:off x="457200" y="868680"/>
-            <a:ext cx="10972800" cy="594360"/>
-          </a:xfrm>
-          <a:prstGeom prst="rect">
-            <a:avLst/>
-          </a:prstGeom>
-          <a:noFill/>
-          <a:ln/>
-        </p:spPr>
-        <p:txBody>
-          <a:bodyPr wrap="square" rtlCol="0" anchor="ctr"/>
+            <a:ext cx="6949440" cy="502920"/>
+          </a:xfrm>
+          <a:prstGeom prst="rect">
+            <a:avLst/>
+          </a:prstGeom>
+          <a:noFill/>
+          <a:ln/>
+        </p:spPr>
+        <p:txBody>
+          <a:bodyPr wrap="square" rtlCol="0" anchor="t">
+            <a:normAutofit/>
+          </a:bodyPr>
+          <a:lstStyle/>
+          <a:p>
+            <a:pPr indent="0" marL="0">
+              <a:buNone/>
+            </a:pPr>
+            <a:r>
+              <a:rPr lang="en-US" sz="2200" b="1" dirty="0">
+                <a:solidFill>
+                  <a:srgbClr val="1A1A1A"/>
+                </a:solidFill>
+                <a:latin typeface="Arial" pitchFamily="34" charset="0"/>
+                <a:ea typeface="Arial" pitchFamily="34" charset="-122"/>
+                <a:cs typeface="Arial" pitchFamily="34" charset="-120"/>
+              </a:rPr>
+              <a:t>Design de Logotipo Profissional</a:t>
+            </a:r>
+            <a:endParaRPr lang="en-US" sz="2200" dirty="0"/>
+          </a:p>
+        </p:txBody>
+      </p:sp>
+      <p:sp>
+        <p:nvSpPr>
+          <p:cNvPr id="5" name="Text 3"/>
+          <p:cNvSpPr/>
+          <p:nvPr/>
+        </p:nvSpPr>
+        <p:spPr>
+          <a:xfrm>
+            <a:off x="457200" y="1481328"/>
+            <a:ext cx="6949440" cy="820928"/>
+          </a:xfrm>
+          <a:prstGeom prst="rect">
+            <a:avLst/>
+          </a:prstGeom>
+          <a:noFill/>
+          <a:ln/>
+        </p:spPr>
+        <p:txBody>
+          <a:bodyPr wrap="square" rtlCol="0" anchor="t">
+            <a:normAutofit/>
+          </a:bodyPr>
           <a:lstStyle/>
           <a:p>
             <a:pPr indent="0" marL="0">
@@ -2062,62 +2105,25 @@
       </p:sp>
       <p:sp>
         <p:nvSpPr>
-          <p:cNvPr id="5" name="Text 3"/>
-          <p:cNvSpPr/>
-          <p:nvPr/>
-        </p:nvSpPr>
-        <p:spPr>
-          <a:xfrm>
-            <a:off x="457200" y="1645920"/>
-            <a:ext cx="10972800" cy="594360"/>
-          </a:xfrm>
-          <a:prstGeom prst="rect">
-            <a:avLst/>
-          </a:prstGeom>
-          <a:noFill/>
-          <a:ln/>
-        </p:spPr>
-        <p:txBody>
-          <a:bodyPr wrap="square" rtlCol="0" anchor="ctr"/>
-          <a:lstStyle/>
-          <a:p>
-            <a:pPr indent="0" marL="0">
-              <a:buNone/>
-            </a:pPr>
-            <a:r>
-              <a:rPr lang="en-US" sz="2200" b="1" dirty="0">
-                <a:solidFill>
-                  <a:srgbClr val="1A1A1A"/>
-                </a:solidFill>
-                <a:latin typeface="Arial" pitchFamily="34" charset="0"/>
-                <a:ea typeface="Arial" pitchFamily="34" charset="-122"/>
-                <a:cs typeface="Arial" pitchFamily="34" charset="-120"/>
-              </a:rPr>
-              <a:t>DESIGN DE LOGOTIPO PROFISSIONAL</a:t>
-            </a:r>
-            <a:endParaRPr lang="en-US" sz="2200" dirty="0"/>
-          </a:p>
-        </p:txBody>
-      </p:sp>
-      <p:sp>
-        <p:nvSpPr>
           <p:cNvPr id="6" name="Text 4"/>
           <p:cNvSpPr/>
           <p:nvPr/>
         </p:nvSpPr>
         <p:spPr>
           <a:xfrm>
-            <a:off x="457200" y="2240280"/>
-            <a:ext cx="10972800" cy="822960"/>
-          </a:xfrm>
-          <a:prstGeom prst="rect">
-            <a:avLst/>
-          </a:prstGeom>
-          <a:noFill/>
-          <a:ln/>
-        </p:spPr>
-        <p:txBody>
-          <a:bodyPr wrap="square" rtlCol="0" anchor="t"/>
+            <a:off x="457200" y="2411984"/>
+            <a:ext cx="6949440" cy="502920"/>
+          </a:xfrm>
+          <a:prstGeom prst="rect">
+            <a:avLst/>
+          </a:prstGeom>
+          <a:noFill/>
+          <a:ln/>
+        </p:spPr>
+        <p:txBody>
+          <a:bodyPr wrap="square" rtlCol="0" anchor="t">
+            <a:normAutofit/>
+          </a:bodyPr>
           <a:lstStyle/>
           <a:p>
             <a:pPr indent="0" marL="0">
@@ -2154,8 +2160,8 @@
         </p:blipFill>
         <p:spPr>
           <a:xfrm>
-            <a:off x="7772400" y="1097280"/>
-            <a:ext cx="3657600" cy="2286000"/>
+            <a:off x="7680960" y="1005840"/>
+            <a:ext cx="3840480" cy="2560320"/>
           </a:xfrm>
           <a:prstGeom prst="rect">
             <a:avLst/>
@@ -2272,6 +2278,88 @@
           </a:p>
         </p:txBody>
       </p:sp>
+      <p:sp>
+        <p:nvSpPr>
+          <p:cNvPr id="4" name="Text 2"/>
+          <p:cNvSpPr/>
+          <p:nvPr/>
+        </p:nvSpPr>
+        <p:spPr>
+          <a:xfrm>
+            <a:off x="457200" y="868680"/>
+            <a:ext cx="10972800" cy="502920"/>
+          </a:xfrm>
+          <a:prstGeom prst="rect">
+            <a:avLst/>
+          </a:prstGeom>
+          <a:noFill/>
+          <a:ln/>
+        </p:spPr>
+        <p:txBody>
+          <a:bodyPr wrap="square" rtlCol="0" anchor="t">
+            <a:normAutofit/>
+          </a:bodyPr>
+          <a:lstStyle/>
+          <a:p>
+            <a:pPr indent="0" marL="0">
+              <a:buNone/>
+            </a:pPr>
+            <a:r>
+              <a:rPr lang="en-US" sz="2200" b="1" dirty="0">
+                <a:solidFill>
+                  <a:srgbClr val="1A1A1A"/>
+                </a:solidFill>
+                <a:latin typeface="Arial" pitchFamily="34" charset="0"/>
+                <a:ea typeface="Arial" pitchFamily="34" charset="-122"/>
+                <a:cs typeface="Arial" pitchFamily="34" charset="-120"/>
+              </a:rPr>
+              <a:t>Tratamento de objeções</a:t>
+            </a:r>
+            <a:endParaRPr lang="en-US" sz="2200" dirty="0"/>
+          </a:p>
+        </p:txBody>
+      </p:sp>
+      <p:sp>
+        <p:nvSpPr>
+          <p:cNvPr id="5" name="Text 3"/>
+          <p:cNvSpPr/>
+          <p:nvPr/>
+        </p:nvSpPr>
+        <p:spPr>
+          <a:xfrm>
+            <a:off x="457200" y="1481328"/>
+            <a:ext cx="10972800" cy="502920"/>
+          </a:xfrm>
+          <a:prstGeom prst="rect">
+            <a:avLst/>
+          </a:prstGeom>
+          <a:noFill/>
+          <a:ln/>
+        </p:spPr>
+        <p:txBody>
+          <a:bodyPr wrap="square" rtlCol="0" anchor="t">
+            <a:normAutofit/>
+          </a:bodyPr>
+          <a:lstStyle/>
+          <a:p>
+            <a:pPr indent="0" marL="0">
+              <a:buNone/>
+            </a:pPr>
+            <a:r>
+              <a:rPr lang="en-US" sz="2200" b="1" dirty="0">
+                <a:solidFill>
+                  <a:srgbClr val="1A1A1A"/>
+                </a:solidFill>
+                <a:latin typeface="Arial" pitchFamily="34" charset="0"/>
+                <a:ea typeface="Arial" pitchFamily="34" charset="-122"/>
+                <a:cs typeface="Arial" pitchFamily="34" charset="-120"/>
+              </a:rPr>
+              <a:t>As cinco principais preocupações — e como respondê-las.</a:t>
+            </a:r>
+            <a:endParaRPr lang="en-US" sz="2200" dirty="0"/>
+          </a:p>
+        </p:txBody>
+      </p:sp>
     </p:spTree>
   </p:cSld>
   <p:clrMapOvr>
@@ -2382,6 +2470,334 @@
           </a:p>
         </p:txBody>
       </p:sp>
+      <p:sp>
+        <p:nvSpPr>
+          <p:cNvPr id="4" name="Text 2"/>
+          <p:cNvSpPr/>
+          <p:nvPr/>
+        </p:nvSpPr>
+        <p:spPr>
+          <a:xfrm>
+            <a:off x="457200" y="868680"/>
+            <a:ext cx="10972800" cy="502920"/>
+          </a:xfrm>
+          <a:prstGeom prst="rect">
+            <a:avLst/>
+          </a:prstGeom>
+          <a:noFill/>
+          <a:ln/>
+        </p:spPr>
+        <p:txBody>
+          <a:bodyPr wrap="square" rtlCol="0" anchor="t">
+            <a:normAutofit/>
+          </a:bodyPr>
+          <a:lstStyle/>
+          <a:p>
+            <a:pPr indent="0" marL="0">
+              <a:buNone/>
+            </a:pPr>
+            <a:r>
+              <a:rPr lang="en-US" sz="2200" b="1" dirty="0">
+                <a:solidFill>
+                  <a:srgbClr val="1A1A1A"/>
+                </a:solidFill>
+                <a:latin typeface="Arial" pitchFamily="34" charset="0"/>
+                <a:ea typeface="Arial" pitchFamily="34" charset="-122"/>
+                <a:cs typeface="Arial" pitchFamily="34" charset="-120"/>
+              </a:rPr>
+              <a:t>Posicionamento competitivo</a:t>
+            </a:r>
+            <a:endParaRPr lang="en-US" sz="2200" dirty="0"/>
+          </a:p>
+        </p:txBody>
+      </p:sp>
+      <p:sp>
+        <p:nvSpPr>
+          <p:cNvPr id="5" name="Text 3"/>
+          <p:cNvSpPr/>
+          <p:nvPr/>
+        </p:nvSpPr>
+        <p:spPr>
+          <a:xfrm>
+            <a:off x="457200" y="1481328"/>
+            <a:ext cx="10972800" cy="502920"/>
+          </a:xfrm>
+          <a:prstGeom prst="rect">
+            <a:avLst/>
+          </a:prstGeom>
+          <a:noFill/>
+          <a:ln/>
+        </p:spPr>
+        <p:txBody>
+          <a:bodyPr wrap="square" rtlCol="0" anchor="t">
+            <a:normAutofit/>
+          </a:bodyPr>
+          <a:lstStyle/>
+          <a:p>
+            <a:pPr indent="0" marL="0">
+              <a:buNone/>
+            </a:pPr>
+            <a:r>
+              <a:rPr lang="en-US" sz="2200" b="1" dirty="0">
+                <a:solidFill>
+                  <a:srgbClr val="1A1A1A"/>
+                </a:solidFill>
+                <a:latin typeface="Arial" pitchFamily="34" charset="0"/>
+                <a:ea typeface="Arial" pitchFamily="34" charset="-122"/>
+                <a:cs typeface="Arial" pitchFamily="34" charset="-120"/>
+              </a:rPr>
+              <a:t>Por que vencemos.</a:t>
+            </a:r>
+            <a:endParaRPr lang="en-US" sz="2200" dirty="0"/>
+          </a:p>
+        </p:txBody>
+      </p:sp>
+      <p:sp>
+        <p:nvSpPr>
+          <p:cNvPr id="6" name="Text 4"/>
+          <p:cNvSpPr/>
+          <p:nvPr/>
+        </p:nvSpPr>
+        <p:spPr>
+          <a:xfrm>
+            <a:off x="457200" y="2093976"/>
+            <a:ext cx="10972800" cy="502920"/>
+          </a:xfrm>
+          <a:prstGeom prst="rect">
+            <a:avLst/>
+          </a:prstGeom>
+          <a:noFill/>
+          <a:ln/>
+        </p:spPr>
+        <p:txBody>
+          <a:bodyPr wrap="square" rtlCol="0" anchor="t">
+            <a:normAutofit/>
+          </a:bodyPr>
+          <a:lstStyle/>
+          <a:p>
+            <a:pPr indent="0" marL="0">
+              <a:buNone/>
+            </a:pPr>
+            <a:r>
+              <a:rPr lang="en-US" sz="1300" dirty="0">
+                <a:solidFill>
+                  <a:srgbClr val="4A4A4A"/>
+                </a:solidFill>
+                <a:latin typeface="Arial" pitchFamily="34" charset="0"/>
+                <a:ea typeface="Arial" pitchFamily="34" charset="-122"/>
+                <a:cs typeface="Arial" pitchFamily="34" charset="-120"/>
+              </a:rPr>
+              <a:t>Quatro categorias. Uma frase cada. Use a linha correspondente quando um prospect citar um concorrente específico.</a:t>
+            </a:r>
+            <a:endParaRPr lang="en-US" sz="1300" dirty="0"/>
+          </a:p>
+        </p:txBody>
+      </p:sp>
+      <p:sp>
+        <p:nvSpPr>
+          <p:cNvPr id="7" name="Text 5"/>
+          <p:cNvSpPr/>
+          <p:nvPr/>
+        </p:nvSpPr>
+        <p:spPr>
+          <a:xfrm>
+            <a:off x="457200" y="2734056"/>
+            <a:ext cx="10972800" cy="502920"/>
+          </a:xfrm>
+          <a:prstGeom prst="rect">
+            <a:avLst/>
+          </a:prstGeom>
+          <a:noFill/>
+          <a:ln/>
+        </p:spPr>
+        <p:txBody>
+          <a:bodyPr wrap="square" rtlCol="0" anchor="t">
+            <a:normAutofit/>
+          </a:bodyPr>
+          <a:lstStyle/>
+          <a:p>
+            <a:pPr indent="0" marL="0">
+              <a:buNone/>
+            </a:pPr>
+            <a:r>
+              <a:rPr lang="en-US" sz="1600" b="1" dirty="0">
+                <a:solidFill>
+                  <a:srgbClr val="1A1A1A"/>
+                </a:solidFill>
+                <a:latin typeface="Arial" pitchFamily="34" charset="0"/>
+                <a:ea typeface="Arial" pitchFamily="34" charset="-122"/>
+                <a:cs typeface="Arial" pitchFamily="34" charset="-120"/>
+              </a:rPr>
+              <a:t>Mensagem-chave</a:t>
+            </a:r>
+            <a:endParaRPr lang="en-US" sz="1600" dirty="0"/>
+          </a:p>
+        </p:txBody>
+      </p:sp>
+      <p:sp>
+        <p:nvSpPr>
+          <p:cNvPr id="8" name="Text 6"/>
+          <p:cNvSpPr/>
+          <p:nvPr/>
+        </p:nvSpPr>
+        <p:spPr>
+          <a:xfrm>
+            <a:off x="457200" y="3346704"/>
+            <a:ext cx="10972800" cy="502920"/>
+          </a:xfrm>
+          <a:prstGeom prst="rect">
+            <a:avLst/>
+          </a:prstGeom>
+          <a:noFill/>
+          <a:ln/>
+        </p:spPr>
+        <p:txBody>
+          <a:bodyPr wrap="square" rtlCol="0" anchor="t">
+            <a:normAutofit/>
+          </a:bodyPr>
+          <a:lstStyle/>
+          <a:p>
+            <a:pPr indent="0" marL="0">
+              <a:buNone/>
+            </a:pPr>
+            <a:r>
+              <a:rPr lang="en-US" sz="1300" dirty="0">
+                <a:solidFill>
+                  <a:srgbClr val="4A4A4A"/>
+                </a:solidFill>
+                <a:latin typeface="Arial" pitchFamily="34" charset="0"/>
+                <a:ea typeface="Arial" pitchFamily="34" charset="-122"/>
+                <a:cs typeface="Arial" pitchFamily="34" charset="-120"/>
+              </a:rPr>
+              <a:t>Originalidade criada por humanos, transferência total de direitos, 11 formatos de arquivo. Ferramentas gratuitas costumam oferecer originalidade limitada, direitos parciais e menos formatos.</a:t>
+            </a:r>
+            <a:endParaRPr lang="en-US" sz="1300" dirty="0"/>
+          </a:p>
+        </p:txBody>
+      </p:sp>
+      <p:sp>
+        <p:nvSpPr>
+          <p:cNvPr id="9" name="Text 7"/>
+          <p:cNvSpPr/>
+          <p:nvPr/>
+        </p:nvSpPr>
+        <p:spPr>
+          <a:xfrm>
+            <a:off x="457200" y="3986784"/>
+            <a:ext cx="10972800" cy="502920"/>
+          </a:xfrm>
+          <a:prstGeom prst="rect">
+            <a:avLst/>
+          </a:prstGeom>
+          <a:noFill/>
+          <a:ln/>
+        </p:spPr>
+        <p:txBody>
+          <a:bodyPr wrap="square" rtlCol="0" anchor="t">
+            <a:normAutofit/>
+          </a:bodyPr>
+          <a:lstStyle/>
+          <a:p>
+            <a:pPr indent="0" marL="0">
+              <a:buNone/>
+            </a:pPr>
+            <a:r>
+              <a:rPr lang="en-US" sz="1300" dirty="0">
+                <a:solidFill>
+                  <a:srgbClr val="4A4A4A"/>
+                </a:solidFill>
+                <a:latin typeface="Arial" pitchFamily="34" charset="0"/>
+                <a:ea typeface="Arial" pitchFamily="34" charset="-122"/>
+                <a:cs typeface="Arial" pitchFamily="34" charset="-120"/>
+              </a:rPr>
+              <a:t>Um coordenador dedicado e uma equipe interna que já entregou mais de 75.000 logotipos — não um estranho fazendo malabarismo com trinta projetos simultâneos. Prazos previsíveis.</a:t>
+            </a:r>
+            <a:endParaRPr lang="en-US" sz="1300" dirty="0"/>
+          </a:p>
+        </p:txBody>
+      </p:sp>
+      <p:sp>
+        <p:nvSpPr>
+          <p:cNvPr id="10" name="Text 8"/>
+          <p:cNvSpPr/>
+          <p:nvPr/>
+        </p:nvSpPr>
+        <p:spPr>
+          <a:xfrm>
+            <a:off x="457200" y="4626864"/>
+            <a:ext cx="10972800" cy="502920"/>
+          </a:xfrm>
+          <a:prstGeom prst="rect">
+            <a:avLst/>
+          </a:prstGeom>
+          <a:noFill/>
+          <a:ln/>
+        </p:spPr>
+        <p:txBody>
+          <a:bodyPr wrap="square" rtlCol="0" anchor="t">
+            <a:normAutofit/>
+          </a:bodyPr>
+          <a:lstStyle/>
+          <a:p>
+            <a:pPr indent="0" marL="0">
+              <a:buNone/>
+            </a:pPr>
+            <a:r>
+              <a:rPr lang="en-US" sz="1300" dirty="0">
+                <a:solidFill>
+                  <a:srgbClr val="4A4A4A"/>
+                </a:solidFill>
+                <a:latin typeface="Arial" pitchFamily="34" charset="0"/>
+                <a:ea typeface="Arial" pitchFamily="34" charset="-122"/>
+                <a:cs typeface="Arial" pitchFamily="34" charset="-120"/>
+              </a:rPr>
+              <a:t>Qualidade comparável a uma fração do custo, com escopo e prazo definidos. Sem faturas surpresa, sem expansão de escopo, sem contratos de seis meses.</a:t>
+            </a:r>
+            <a:endParaRPr lang="en-US" sz="1300" dirty="0"/>
+          </a:p>
+        </p:txBody>
+      </p:sp>
+      <p:sp>
+        <p:nvSpPr>
+          <p:cNvPr id="11" name="Text 9"/>
+          <p:cNvSpPr/>
+          <p:nvPr/>
+        </p:nvSpPr>
+        <p:spPr>
+          <a:xfrm>
+            <a:off x="457200" y="5266944"/>
+            <a:ext cx="10972800" cy="502920"/>
+          </a:xfrm>
+          <a:prstGeom prst="rect">
+            <a:avLst/>
+          </a:prstGeom>
+          <a:noFill/>
+          <a:ln/>
+        </p:spPr>
+        <p:txBody>
+          <a:bodyPr wrap="square" rtlCol="0" anchor="t">
+            <a:normAutofit/>
+          </a:bodyPr>
+          <a:lstStyle/>
+          <a:p>
+            <a:pPr indent="0" marL="0">
+              <a:buNone/>
+            </a:pPr>
+            <a:r>
+              <a:rPr lang="en-US" sz="1300" dirty="0">
+                <a:solidFill>
+                  <a:srgbClr val="4A4A4A"/>
+                </a:solidFill>
+                <a:latin typeface="Arial" pitchFamily="34" charset="0"/>
+                <a:ea typeface="Arial" pitchFamily="34" charset="-122"/>
+                <a:cs typeface="Arial" pitchFamily="34" charset="-120"/>
+              </a:rPr>
+              <a:t>20% dos logotipos de 2025 são gerados por IA, o que significa que cada vez se parecem mais. Marcas criadas por humanos permanecem mais diferenciadas — e mais defensáveis como marcas registradas.</a:t>
+            </a:r>
+            <a:endParaRPr lang="en-US" sz="1300" dirty="0"/>
+          </a:p>
+        </p:txBody>
+      </p:sp>
     </p:spTree>
   </p:cSld>
   <p:clrMapOvr>
@@ -2492,6 +2908,375 @@
           </a:p>
         </p:txBody>
       </p:sp>
+      <p:sp>
+        <p:nvSpPr>
+          <p:cNvPr id="4" name="Text 2"/>
+          <p:cNvSpPr/>
+          <p:nvPr/>
+        </p:nvSpPr>
+        <p:spPr>
+          <a:xfrm>
+            <a:off x="457200" y="868680"/>
+            <a:ext cx="10972800" cy="502920"/>
+          </a:xfrm>
+          <a:prstGeom prst="rect">
+            <a:avLst/>
+          </a:prstGeom>
+          <a:noFill/>
+          <a:ln/>
+        </p:spPr>
+        <p:txBody>
+          <a:bodyPr wrap="square" rtlCol="0" anchor="t">
+            <a:normAutofit/>
+          </a:bodyPr>
+          <a:lstStyle/>
+          <a:p>
+            <a:pPr indent="0" marL="0">
+              <a:buNone/>
+            </a:pPr>
+            <a:r>
+              <a:rPr lang="en-US" sz="2200" b="1" dirty="0">
+                <a:solidFill>
+                  <a:srgbClr val="1A1A1A"/>
+                </a:solidFill>
+                <a:latin typeface="Arial" pitchFamily="34" charset="0"/>
+                <a:ea typeface="Arial" pitchFamily="34" charset="-122"/>
+                <a:cs typeface="Arial" pitchFamily="34" charset="-120"/>
+              </a:rPr>
+              <a:t>Perguntas frequentes</a:t>
+            </a:r>
+            <a:endParaRPr lang="en-US" sz="2200" dirty="0"/>
+          </a:p>
+        </p:txBody>
+      </p:sp>
+      <p:sp>
+        <p:nvSpPr>
+          <p:cNvPr id="5" name="Text 3"/>
+          <p:cNvSpPr/>
+          <p:nvPr/>
+        </p:nvSpPr>
+        <p:spPr>
+          <a:xfrm>
+            <a:off x="457200" y="1481328"/>
+            <a:ext cx="10972800" cy="502920"/>
+          </a:xfrm>
+          <a:prstGeom prst="rect">
+            <a:avLst/>
+          </a:prstGeom>
+          <a:noFill/>
+          <a:ln/>
+        </p:spPr>
+        <p:txBody>
+          <a:bodyPr wrap="square" rtlCol="0" anchor="t">
+            <a:normAutofit/>
+          </a:bodyPr>
+          <a:lstStyle/>
+          <a:p>
+            <a:pPr indent="0" marL="0">
+              <a:buNone/>
+            </a:pPr>
+            <a:r>
+              <a:rPr lang="en-US" sz="2200" b="1" dirty="0">
+                <a:solidFill>
+                  <a:srgbClr val="1A1A1A"/>
+                </a:solidFill>
+                <a:latin typeface="Arial" pitchFamily="34" charset="0"/>
+                <a:ea typeface="Arial" pitchFamily="34" charset="-122"/>
+                <a:cs typeface="Arial" pitchFamily="34" charset="-120"/>
+              </a:rPr>
+              <a:t>As perguntas que os clientes mais fazem.</a:t>
+            </a:r>
+            <a:endParaRPr lang="en-US" sz="2200" dirty="0"/>
+          </a:p>
+        </p:txBody>
+      </p:sp>
+      <p:sp>
+        <p:nvSpPr>
+          <p:cNvPr id="6" name="Text 4"/>
+          <p:cNvSpPr/>
+          <p:nvPr/>
+        </p:nvSpPr>
+        <p:spPr>
+          <a:xfrm>
+            <a:off x="457200" y="2093976"/>
+            <a:ext cx="10972800" cy="502920"/>
+          </a:xfrm>
+          <a:prstGeom prst="rect">
+            <a:avLst/>
+          </a:prstGeom>
+          <a:noFill/>
+          <a:ln/>
+        </p:spPr>
+        <p:txBody>
+          <a:bodyPr wrap="square" rtlCol="0" anchor="t">
+            <a:normAutofit/>
+          </a:bodyPr>
+          <a:lstStyle/>
+          <a:p>
+            <a:pPr indent="0" marL="0">
+              <a:buNone/>
+            </a:pPr>
+            <a:r>
+              <a:rPr lang="en-US" sz="1600" b="1" dirty="0">
+                <a:solidFill>
+                  <a:srgbClr val="1A1A1A"/>
+                </a:solidFill>
+                <a:latin typeface="Arial" pitchFamily="34" charset="0"/>
+                <a:ea typeface="Arial" pitchFamily="34" charset="-122"/>
+                <a:cs typeface="Arial" pitchFamily="34" charset="-120"/>
+              </a:rPr>
+              <a:t>Quantas revisões estão incluídas?</a:t>
+            </a:r>
+            <a:endParaRPr lang="en-US" sz="1600" dirty="0"/>
+          </a:p>
+        </p:txBody>
+      </p:sp>
+      <p:sp>
+        <p:nvSpPr>
+          <p:cNvPr id="7" name="Text 5"/>
+          <p:cNvSpPr/>
+          <p:nvPr/>
+        </p:nvSpPr>
+        <p:spPr>
+          <a:xfrm>
+            <a:off x="457200" y="2706624"/>
+            <a:ext cx="10972800" cy="502920"/>
+          </a:xfrm>
+          <a:prstGeom prst="rect">
+            <a:avLst/>
+          </a:prstGeom>
+          <a:noFill/>
+          <a:ln/>
+        </p:spPr>
+        <p:txBody>
+          <a:bodyPr wrap="square" rtlCol="0" anchor="t">
+            <a:normAutofit/>
+          </a:bodyPr>
+          <a:lstStyle/>
+          <a:p>
+            <a:pPr indent="0" marL="0">
+              <a:buNone/>
+            </a:pPr>
+            <a:r>
+              <a:rPr lang="en-US" sz="1300" dirty="0">
+                <a:solidFill>
+                  <a:srgbClr val="4A4A4A"/>
+                </a:solidFill>
+                <a:latin typeface="Arial" pitchFamily="34" charset="0"/>
+                <a:ea typeface="Arial" pitchFamily="34" charset="-122"/>
+                <a:cs typeface="Arial" pitchFamily="34" charset="-120"/>
+              </a:rPr>
+              <a:t>Até três rodadas em cada plano. Revisões adicionais estão disponíveis por uma taxa extra.</a:t>
+            </a:r>
+            <a:endParaRPr lang="en-US" sz="1300" dirty="0"/>
+          </a:p>
+        </p:txBody>
+      </p:sp>
+      <p:sp>
+        <p:nvSpPr>
+          <p:cNvPr id="8" name="Text 6"/>
+          <p:cNvSpPr/>
+          <p:nvPr/>
+        </p:nvSpPr>
+        <p:spPr>
+          <a:xfrm>
+            <a:off x="457200" y="3346704"/>
+            <a:ext cx="10972800" cy="502920"/>
+          </a:xfrm>
+          <a:prstGeom prst="rect">
+            <a:avLst/>
+          </a:prstGeom>
+          <a:noFill/>
+          <a:ln/>
+        </p:spPr>
+        <p:txBody>
+          <a:bodyPr wrap="square" rtlCol="0" anchor="t">
+            <a:normAutofit/>
+          </a:bodyPr>
+          <a:lstStyle/>
+          <a:p>
+            <a:pPr indent="0" marL="0">
+              <a:buNone/>
+            </a:pPr>
+            <a:r>
+              <a:rPr lang="en-US" sz="1600" b="1" dirty="0">
+                <a:solidFill>
+                  <a:srgbClr val="1A1A1A"/>
+                </a:solidFill>
+                <a:latin typeface="Arial" pitchFamily="34" charset="0"/>
+                <a:ea typeface="Arial" pitchFamily="34" charset="-122"/>
+                <a:cs typeface="Arial" pitchFamily="34" charset="-120"/>
+              </a:rPr>
+              <a:t>Quanto tempo leva?</a:t>
+            </a:r>
+            <a:endParaRPr lang="en-US" sz="1600" dirty="0"/>
+          </a:p>
+        </p:txBody>
+      </p:sp>
+      <p:sp>
+        <p:nvSpPr>
+          <p:cNvPr id="9" name="Text 7"/>
+          <p:cNvSpPr/>
+          <p:nvPr/>
+        </p:nvSpPr>
+        <p:spPr>
+          <a:xfrm>
+            <a:off x="457200" y="3959352"/>
+            <a:ext cx="10972800" cy="502920"/>
+          </a:xfrm>
+          <a:prstGeom prst="rect">
+            <a:avLst/>
+          </a:prstGeom>
+          <a:noFill/>
+          <a:ln/>
+        </p:spPr>
+        <p:txBody>
+          <a:bodyPr wrap="square" rtlCol="0" anchor="t">
+            <a:normAutofit/>
+          </a:bodyPr>
+          <a:lstStyle/>
+          <a:p>
+            <a:pPr indent="0" marL="0">
+              <a:buNone/>
+            </a:pPr>
+            <a:r>
+              <a:rPr lang="en-US" sz="1300" dirty="0">
+                <a:solidFill>
+                  <a:srgbClr val="4A4A4A"/>
+                </a:solidFill>
+                <a:latin typeface="Arial" pitchFamily="34" charset="0"/>
+                <a:ea typeface="Arial" pitchFamily="34" charset="-122"/>
+                <a:cs typeface="Arial" pitchFamily="34" charset="-120"/>
+              </a:rPr>
+              <a:t>Os conceitos chegam em três a cinco dias úteis. Projetos completos normalmente são concluídos em duas a três semanas.</a:t>
+            </a:r>
+            <a:endParaRPr lang="en-US" sz="1300" dirty="0"/>
+          </a:p>
+        </p:txBody>
+      </p:sp>
+      <p:sp>
+        <p:nvSpPr>
+          <p:cNvPr id="10" name="Text 8"/>
+          <p:cNvSpPr/>
+          <p:nvPr/>
+        </p:nvSpPr>
+        <p:spPr>
+          <a:xfrm>
+            <a:off x="457200" y="4599432"/>
+            <a:ext cx="10972800" cy="502920"/>
+          </a:xfrm>
+          <a:prstGeom prst="rect">
+            <a:avLst/>
+          </a:prstGeom>
+          <a:noFill/>
+          <a:ln/>
+        </p:spPr>
+        <p:txBody>
+          <a:bodyPr wrap="square" rtlCol="0" anchor="t">
+            <a:normAutofit/>
+          </a:bodyPr>
+          <a:lstStyle/>
+          <a:p>
+            <a:pPr indent="0" marL="0">
+              <a:buNone/>
+            </a:pPr>
+            <a:r>
+              <a:rPr lang="en-US" sz="1600" b="1" dirty="0">
+                <a:solidFill>
+                  <a:srgbClr val="1A1A1A"/>
+                </a:solidFill>
+                <a:latin typeface="Arial" pitchFamily="34" charset="0"/>
+                <a:ea typeface="Arial" pitchFamily="34" charset="-122"/>
+                <a:cs typeface="Arial" pitchFamily="34" charset="-120"/>
+              </a:rPr>
+              <a:t>Quais formatos de arquivo eu recebo?</a:t>
+            </a:r>
+            <a:endParaRPr lang="en-US" sz="1600" dirty="0"/>
+          </a:p>
+        </p:txBody>
+      </p:sp>
+      <p:sp>
+        <p:nvSpPr>
+          <p:cNvPr id="11" name="Text 9"/>
+          <p:cNvSpPr/>
+          <p:nvPr/>
+        </p:nvSpPr>
+        <p:spPr>
+          <a:xfrm>
+            <a:off x="457200" y="5212080"/>
+            <a:ext cx="10972800" cy="502920"/>
+          </a:xfrm>
+          <a:prstGeom prst="rect">
+            <a:avLst/>
+          </a:prstGeom>
+          <a:noFill/>
+          <a:ln/>
+        </p:spPr>
+        <p:txBody>
+          <a:bodyPr wrap="square" rtlCol="0" anchor="t">
+            <a:normAutofit/>
+          </a:bodyPr>
+          <a:lstStyle/>
+          <a:p>
+            <a:pPr indent="0" marL="0">
+              <a:buNone/>
+            </a:pPr>
+            <a:r>
+              <a:rPr lang="en-US" sz="1300" dirty="0">
+                <a:solidFill>
+                  <a:srgbClr val="4A4A4A"/>
+                </a:solidFill>
+                <a:latin typeface="Arial" pitchFamily="34" charset="0"/>
+                <a:ea typeface="Arial" pitchFamily="34" charset="-122"/>
+                <a:cs typeface="Arial" pitchFamily="34" charset="-120"/>
+              </a:rPr>
+              <a:t>Onze formatos — AI, EPS, PDF, JPG, PNG, GIF e ICO. Seis em cor, cinco em preto e branco.</a:t>
+            </a:r>
+            <a:endParaRPr lang="en-US" sz="1300" dirty="0"/>
+          </a:p>
+        </p:txBody>
+      </p:sp>
+      <p:sp>
+        <p:nvSpPr>
+          <p:cNvPr id="12" name="Text 10"/>
+          <p:cNvSpPr/>
+          <p:nvPr/>
+        </p:nvSpPr>
+        <p:spPr>
+          <a:xfrm>
+            <a:off x="457200" y="5852160"/>
+            <a:ext cx="10972800" cy="502920"/>
+          </a:xfrm>
+          <a:prstGeom prst="rect">
+            <a:avLst/>
+          </a:prstGeom>
+          <a:noFill/>
+          <a:ln/>
+        </p:spPr>
+        <p:txBody>
+          <a:bodyPr wrap="square" rtlCol="0" anchor="t">
+            <a:normAutofit/>
+          </a:bodyPr>
+          <a:lstStyle/>
+          <a:p>
+            <a:pPr indent="0" marL="0">
+              <a:buNone/>
+            </a:pPr>
+            <a:r>
+              <a:rPr lang="en-US" sz="1600" b="1" dirty="0">
+                <a:solidFill>
+                  <a:srgbClr val="1A1A1A"/>
+                </a:solidFill>
+                <a:latin typeface="Arial" pitchFamily="34" charset="0"/>
+                <a:ea typeface="Arial" pitchFamily="34" charset="-122"/>
+                <a:cs typeface="Arial" pitchFamily="34" charset="-120"/>
+              </a:rPr>
+              <a:t>Quem é dono do logotipo finalizado?</a:t>
+            </a:r>
+            <a:endParaRPr lang="en-US" sz="1600" dirty="0"/>
+          </a:p>
+        </p:txBody>
+      </p:sp>
     </p:spTree>
   </p:cSld>
   <p:clrMapOvr>
@@ -2602,6 +3387,129 @@
           </a:p>
         </p:txBody>
       </p:sp>
+      <p:sp>
+        <p:nvSpPr>
+          <p:cNvPr id="4" name="Text 2"/>
+          <p:cNvSpPr/>
+          <p:nvPr/>
+        </p:nvSpPr>
+        <p:spPr>
+          <a:xfrm>
+            <a:off x="457200" y="868680"/>
+            <a:ext cx="10972800" cy="502920"/>
+          </a:xfrm>
+          <a:prstGeom prst="rect">
+            <a:avLst/>
+          </a:prstGeom>
+          <a:noFill/>
+          <a:ln/>
+        </p:spPr>
+        <p:txBody>
+          <a:bodyPr wrap="square" rtlCol="0" anchor="t">
+            <a:normAutofit/>
+          </a:bodyPr>
+          <a:lstStyle/>
+          <a:p>
+            <a:pPr indent="0" marL="0">
+              <a:buNone/>
+            </a:pPr>
+            <a:r>
+              <a:rPr lang="en-US" sz="2800" b="1" dirty="0">
+                <a:solidFill>
+                  <a:srgbClr val="1A1A1A"/>
+                </a:solidFill>
+                <a:latin typeface="Arial" pitchFamily="34" charset="0"/>
+                <a:ea typeface="Arial" pitchFamily="34" charset="-122"/>
+                <a:cs typeface="Arial" pitchFamily="34" charset="-120"/>
+              </a:rPr>
+              <a:t>Começar</a:t>
+            </a:r>
+            <a:endParaRPr lang="en-US" sz="2800" dirty="0"/>
+          </a:p>
+        </p:txBody>
+      </p:sp>
+      <p:sp>
+        <p:nvSpPr>
+          <p:cNvPr id="5" name="Text 3"/>
+          <p:cNvSpPr/>
+          <p:nvPr/>
+        </p:nvSpPr>
+        <p:spPr>
+          <a:xfrm>
+            <a:off x="457200" y="1481328"/>
+            <a:ext cx="10972800" cy="502920"/>
+          </a:xfrm>
+          <a:prstGeom prst="rect">
+            <a:avLst/>
+          </a:prstGeom>
+          <a:noFill/>
+          <a:ln/>
+        </p:spPr>
+        <p:txBody>
+          <a:bodyPr wrap="square" rtlCol="0" anchor="t">
+            <a:normAutofit/>
+          </a:bodyPr>
+          <a:lstStyle/>
+          <a:p>
+            <a:pPr indent="0" marL="0">
+              <a:buNone/>
+            </a:pPr>
+            <a:r>
+              <a:rPr lang="en-US" sz="1300" dirty="0">
+                <a:solidFill>
+                  <a:srgbClr val="4A4A4A"/>
+                </a:solidFill>
+                <a:latin typeface="Arial" pitchFamily="34" charset="0"/>
+                <a:ea typeface="Arial" pitchFamily="34" charset="-122"/>
+                <a:cs typeface="Arial" pitchFamily="34" charset="-120"/>
+              </a:rPr>
+              <a:t>Tem dúvidas, quer agendar uma demonstração ou explorar como estas soluções podem apoiar suas equipes de vendas hoje?</a:t>
+            </a:r>
+            <a:endParaRPr lang="en-US" sz="1300" dirty="0"/>
+          </a:p>
+        </p:txBody>
+      </p:sp>
+      <p:sp>
+        <p:nvSpPr>
+          <p:cNvPr id="6" name="Text 4"/>
+          <p:cNvSpPr/>
+          <p:nvPr/>
+        </p:nvSpPr>
+        <p:spPr>
+          <a:xfrm>
+            <a:off x="457200" y="2121408"/>
+            <a:ext cx="10972800" cy="502920"/>
+          </a:xfrm>
+          <a:prstGeom prst="rect">
+            <a:avLst/>
+          </a:prstGeom>
+          <a:noFill/>
+          <a:ln/>
+        </p:spPr>
+        <p:txBody>
+          <a:bodyPr wrap="square" rtlCol="0" anchor="t">
+            <a:normAutofit/>
+          </a:bodyPr>
+          <a:lstStyle/>
+          <a:p>
+            <a:pPr indent="0" marL="0">
+              <a:buNone/>
+            </a:pPr>
+            <a:r>
+              <a:rPr lang="en-US" sz="1300" dirty="0">
+                <a:solidFill>
+                  <a:srgbClr val="4A4A4A"/>
+                </a:solidFill>
+                <a:latin typeface="Arial" pitchFamily="34" charset="0"/>
+                <a:ea typeface="Arial" pitchFamily="34" charset="-122"/>
+                <a:cs typeface="Arial" pitchFamily="34" charset="-120"/>
+              </a:rPr>
+              <a:t>Fale conosco em marketing@hostopia.com para saber mais e conectar-se com um de nossos especialistas.</a:t>
+            </a:r>
+            <a:endParaRPr lang="en-US" sz="1300" dirty="0"/>
+          </a:p>
+        </p:txBody>
+      </p:sp>
     </p:spTree>
   </p:cSld>
   <p:clrMapOvr>
@@ -2712,6 +3620,375 @@
           </a:p>
         </p:txBody>
       </p:sp>
+      <p:sp>
+        <p:nvSpPr>
+          <p:cNvPr id="4" name="Text 2"/>
+          <p:cNvSpPr/>
+          <p:nvPr/>
+        </p:nvSpPr>
+        <p:spPr>
+          <a:xfrm>
+            <a:off x="457200" y="868680"/>
+            <a:ext cx="10972800" cy="502920"/>
+          </a:xfrm>
+          <a:prstGeom prst="rect">
+            <a:avLst/>
+          </a:prstGeom>
+          <a:noFill/>
+          <a:ln/>
+        </p:spPr>
+        <p:txBody>
+          <a:bodyPr wrap="square" rtlCol="0" anchor="t">
+            <a:normAutofit/>
+          </a:bodyPr>
+          <a:lstStyle/>
+          <a:p>
+            <a:pPr indent="0" marL="0">
+              <a:buNone/>
+            </a:pPr>
+            <a:r>
+              <a:rPr lang="en-US" sz="2200" b="1" dirty="0">
+                <a:solidFill>
+                  <a:srgbClr val="1A1A1A"/>
+                </a:solidFill>
+                <a:latin typeface="Arial" pitchFamily="34" charset="0"/>
+                <a:ea typeface="Arial" pitchFamily="34" charset="-122"/>
+                <a:cs typeface="Arial" pitchFamily="34" charset="-120"/>
+              </a:rPr>
+              <a:t>O que vamos abordar.</a:t>
+            </a:r>
+            <a:endParaRPr lang="en-US" sz="2200" dirty="0"/>
+          </a:p>
+        </p:txBody>
+      </p:sp>
+      <p:sp>
+        <p:nvSpPr>
+          <p:cNvPr id="5" name="Text 3"/>
+          <p:cNvSpPr/>
+          <p:nvPr/>
+        </p:nvSpPr>
+        <p:spPr>
+          <a:xfrm>
+            <a:off x="457200" y="1481328"/>
+            <a:ext cx="10972800" cy="502920"/>
+          </a:xfrm>
+          <a:prstGeom prst="rect">
+            <a:avLst/>
+          </a:prstGeom>
+          <a:noFill/>
+          <a:ln/>
+        </p:spPr>
+        <p:txBody>
+          <a:bodyPr wrap="square" rtlCol="0" anchor="t">
+            <a:normAutofit/>
+          </a:bodyPr>
+          <a:lstStyle/>
+          <a:p>
+            <a:pPr indent="0" marL="0">
+              <a:buNone/>
+            </a:pPr>
+            <a:r>
+              <a:rPr lang="en-US" sz="1300" dirty="0">
+                <a:solidFill>
+                  <a:srgbClr val="4A4A4A"/>
+                </a:solidFill>
+                <a:latin typeface="Arial" pitchFamily="34" charset="0"/>
+                <a:ea typeface="Arial" pitchFamily="34" charset="-122"/>
+                <a:cs typeface="Arial" pitchFamily="34" charset="-120"/>
+              </a:rPr>
+              <a:t>Vinte e cinco minutos, cinco seções. A maior parte do valor está na seção cinco.</a:t>
+            </a:r>
+            <a:endParaRPr lang="en-US" sz="1300" dirty="0"/>
+          </a:p>
+        </p:txBody>
+      </p:sp>
+      <p:sp>
+        <p:nvSpPr>
+          <p:cNvPr id="6" name="Text 4"/>
+          <p:cNvSpPr/>
+          <p:nvPr/>
+        </p:nvSpPr>
+        <p:spPr>
+          <a:xfrm>
+            <a:off x="457200" y="2121408"/>
+            <a:ext cx="10972800" cy="502920"/>
+          </a:xfrm>
+          <a:prstGeom prst="rect">
+            <a:avLst/>
+          </a:prstGeom>
+          <a:noFill/>
+          <a:ln/>
+        </p:spPr>
+        <p:txBody>
+          <a:bodyPr wrap="square" rtlCol="0" anchor="t">
+            <a:normAutofit/>
+          </a:bodyPr>
+          <a:lstStyle/>
+          <a:p>
+            <a:pPr indent="0" marL="0">
+              <a:buNone/>
+            </a:pPr>
+            <a:r>
+              <a:rPr lang="en-US" sz="1600" b="1" dirty="0">
+                <a:solidFill>
+                  <a:srgbClr val="1A1A1A"/>
+                </a:solidFill>
+                <a:latin typeface="Arial" pitchFamily="34" charset="0"/>
+                <a:ea typeface="Arial" pitchFamily="34" charset="-122"/>
+                <a:cs typeface="Arial" pitchFamily="34" charset="-120"/>
+              </a:rPr>
+              <a:t>Por que logotipos importam hoje</a:t>
+            </a:r>
+            <a:endParaRPr lang="en-US" sz="1600" dirty="0"/>
+          </a:p>
+        </p:txBody>
+      </p:sp>
+      <p:sp>
+        <p:nvSpPr>
+          <p:cNvPr id="7" name="Text 5"/>
+          <p:cNvSpPr/>
+          <p:nvPr/>
+        </p:nvSpPr>
+        <p:spPr>
+          <a:xfrm>
+            <a:off x="457200" y="2734056"/>
+            <a:ext cx="10972800" cy="502920"/>
+          </a:xfrm>
+          <a:prstGeom prst="rect">
+            <a:avLst/>
+          </a:prstGeom>
+          <a:noFill/>
+          <a:ln/>
+        </p:spPr>
+        <p:txBody>
+          <a:bodyPr wrap="square" rtlCol="0" anchor="t">
+            <a:normAutofit/>
+          </a:bodyPr>
+          <a:lstStyle/>
+          <a:p>
+            <a:pPr indent="0" marL="0">
+              <a:buNone/>
+            </a:pPr>
+            <a:r>
+              <a:rPr lang="en-US" sz="1300" dirty="0">
+                <a:solidFill>
+                  <a:srgbClr val="4A4A4A"/>
+                </a:solidFill>
+                <a:latin typeface="Arial" pitchFamily="34" charset="0"/>
+                <a:ea typeface="Arial" pitchFamily="34" charset="-122"/>
+                <a:cs typeface="Arial" pitchFamily="34" charset="-120"/>
+              </a:rPr>
+              <a:t>Os dados de 2025 sobre primeiras impressões e confiança na marca.</a:t>
+            </a:r>
+            <a:endParaRPr lang="en-US" sz="1300" dirty="0"/>
+          </a:p>
+        </p:txBody>
+      </p:sp>
+      <p:sp>
+        <p:nvSpPr>
+          <p:cNvPr id="8" name="Text 6"/>
+          <p:cNvSpPr/>
+          <p:nvPr/>
+        </p:nvSpPr>
+        <p:spPr>
+          <a:xfrm>
+            <a:off x="457200" y="3374136"/>
+            <a:ext cx="10972800" cy="502920"/>
+          </a:xfrm>
+          <a:prstGeom prst="rect">
+            <a:avLst/>
+          </a:prstGeom>
+          <a:noFill/>
+          <a:ln/>
+        </p:spPr>
+        <p:txBody>
+          <a:bodyPr wrap="square" rtlCol="0" anchor="t">
+            <a:normAutofit/>
+          </a:bodyPr>
+          <a:lstStyle/>
+          <a:p>
+            <a:pPr indent="0" marL="0">
+              <a:buNone/>
+            </a:pPr>
+            <a:r>
+              <a:rPr lang="en-US" sz="1600" b="1" dirty="0">
+                <a:solidFill>
+                  <a:srgbClr val="1A1A1A"/>
+                </a:solidFill>
+                <a:latin typeface="Arial" pitchFamily="34" charset="0"/>
+                <a:ea typeface="Arial" pitchFamily="34" charset="-122"/>
+                <a:cs typeface="Arial" pitchFamily="34" charset="-120"/>
+              </a:rPr>
+              <a:t>O produto</a:t>
+            </a:r>
+            <a:endParaRPr lang="en-US" sz="1600" dirty="0"/>
+          </a:p>
+        </p:txBody>
+      </p:sp>
+      <p:sp>
+        <p:nvSpPr>
+          <p:cNvPr id="9" name="Text 7"/>
+          <p:cNvSpPr/>
+          <p:nvPr/>
+        </p:nvSpPr>
+        <p:spPr>
+          <a:xfrm>
+            <a:off x="457200" y="3986784"/>
+            <a:ext cx="10972800" cy="502920"/>
+          </a:xfrm>
+          <a:prstGeom prst="rect">
+            <a:avLst/>
+          </a:prstGeom>
+          <a:noFill/>
+          <a:ln/>
+        </p:spPr>
+        <p:txBody>
+          <a:bodyPr wrap="square" rtlCol="0" anchor="t">
+            <a:normAutofit/>
+          </a:bodyPr>
+          <a:lstStyle/>
+          <a:p>
+            <a:pPr indent="0" marL="0">
+              <a:buNone/>
+            </a:pPr>
+            <a:r>
+              <a:rPr lang="en-US" sz="1300" dirty="0">
+                <a:solidFill>
+                  <a:srgbClr val="4A4A4A"/>
+                </a:solidFill>
+                <a:latin typeface="Arial" pitchFamily="34" charset="0"/>
+                <a:ea typeface="Arial" pitchFamily="34" charset="-122"/>
+                <a:cs typeface="Arial" pitchFamily="34" charset="-120"/>
+              </a:rPr>
+              <a:t>O que é, para quem é e o que está incluído.</a:t>
+            </a:r>
+            <a:endParaRPr lang="en-US" sz="1300" dirty="0"/>
+          </a:p>
+        </p:txBody>
+      </p:sp>
+      <p:sp>
+        <p:nvSpPr>
+          <p:cNvPr id="10" name="Text 8"/>
+          <p:cNvSpPr/>
+          <p:nvPr/>
+        </p:nvSpPr>
+        <p:spPr>
+          <a:xfrm>
+            <a:off x="457200" y="4626864"/>
+            <a:ext cx="10972800" cy="502920"/>
+          </a:xfrm>
+          <a:prstGeom prst="rect">
+            <a:avLst/>
+          </a:prstGeom>
+          <a:noFill/>
+          <a:ln/>
+        </p:spPr>
+        <p:txBody>
+          <a:bodyPr wrap="square" rtlCol="0" anchor="t">
+            <a:normAutofit/>
+          </a:bodyPr>
+          <a:lstStyle/>
+          <a:p>
+            <a:pPr indent="0" marL="0">
+              <a:buNone/>
+            </a:pPr>
+            <a:r>
+              <a:rPr lang="en-US" sz="1600" b="1" dirty="0">
+                <a:solidFill>
+                  <a:srgbClr val="1A1A1A"/>
+                </a:solidFill>
+                <a:latin typeface="Arial" pitchFamily="34" charset="0"/>
+                <a:ea typeface="Arial" pitchFamily="34" charset="-122"/>
+                <a:cs typeface="Arial" pitchFamily="34" charset="-120"/>
+              </a:rPr>
+              <a:t>O processo criativo</a:t>
+            </a:r>
+            <a:endParaRPr lang="en-US" sz="1600" dirty="0"/>
+          </a:p>
+        </p:txBody>
+      </p:sp>
+      <p:sp>
+        <p:nvSpPr>
+          <p:cNvPr id="11" name="Text 9"/>
+          <p:cNvSpPr/>
+          <p:nvPr/>
+        </p:nvSpPr>
+        <p:spPr>
+          <a:xfrm>
+            <a:off x="457200" y="5239512"/>
+            <a:ext cx="10972800" cy="502920"/>
+          </a:xfrm>
+          <a:prstGeom prst="rect">
+            <a:avLst/>
+          </a:prstGeom>
+          <a:noFill/>
+          <a:ln/>
+        </p:spPr>
+        <p:txBody>
+          <a:bodyPr wrap="square" rtlCol="0" anchor="t">
+            <a:normAutofit/>
+          </a:bodyPr>
+          <a:lstStyle/>
+          <a:p>
+            <a:pPr indent="0" marL="0">
+              <a:buNone/>
+            </a:pPr>
+            <a:r>
+              <a:rPr lang="en-US" sz="1300" dirty="0">
+                <a:solidFill>
+                  <a:srgbClr val="4A4A4A"/>
+                </a:solidFill>
+                <a:latin typeface="Arial" pitchFamily="34" charset="0"/>
+                <a:ea typeface="Arial" pitchFamily="34" charset="-122"/>
+                <a:cs typeface="Arial" pitchFamily="34" charset="-120"/>
+              </a:rPr>
+              <a:t>Do briefing aos arquivos finais em 2–3 semanas.</a:t>
+            </a:r>
+            <a:endParaRPr lang="en-US" sz="1300" dirty="0"/>
+          </a:p>
+        </p:txBody>
+      </p:sp>
+      <p:sp>
+        <p:nvSpPr>
+          <p:cNvPr id="12" name="Text 10"/>
+          <p:cNvSpPr/>
+          <p:nvPr/>
+        </p:nvSpPr>
+        <p:spPr>
+          <a:xfrm>
+            <a:off x="457200" y="5879592"/>
+            <a:ext cx="10972800" cy="502920"/>
+          </a:xfrm>
+          <a:prstGeom prst="rect">
+            <a:avLst/>
+          </a:prstGeom>
+          <a:noFill/>
+          <a:ln/>
+        </p:spPr>
+        <p:txBody>
+          <a:bodyPr wrap="square" rtlCol="0" anchor="t">
+            <a:normAutofit/>
+          </a:bodyPr>
+          <a:lstStyle/>
+          <a:p>
+            <a:pPr indent="0" marL="0">
+              <a:buNone/>
+            </a:pPr>
+            <a:r>
+              <a:rPr lang="en-US" sz="1600" b="1" dirty="0">
+                <a:solidFill>
+                  <a:srgbClr val="1A1A1A"/>
+                </a:solidFill>
+                <a:latin typeface="Arial" pitchFamily="34" charset="0"/>
+                <a:ea typeface="Arial" pitchFamily="34" charset="-122"/>
+                <a:cs typeface="Arial" pitchFamily="34" charset="-120"/>
+              </a:rPr>
+              <a:t>Planos</a:t>
+            </a:r>
+            <a:endParaRPr lang="en-US" sz="1600" dirty="0"/>
+          </a:p>
+        </p:txBody>
+      </p:sp>
     </p:spTree>
   </p:cSld>
   <p:clrMapOvr>
@@ -2822,6 +4099,375 @@
           </a:p>
         </p:txBody>
       </p:sp>
+      <p:sp>
+        <p:nvSpPr>
+          <p:cNvPr id="4" name="Text 2"/>
+          <p:cNvSpPr/>
+          <p:nvPr/>
+        </p:nvSpPr>
+        <p:spPr>
+          <a:xfrm>
+            <a:off x="457200" y="868680"/>
+            <a:ext cx="10972800" cy="502920"/>
+          </a:xfrm>
+          <a:prstGeom prst="rect">
+            <a:avLst/>
+          </a:prstGeom>
+          <a:noFill/>
+          <a:ln/>
+        </p:spPr>
+        <p:txBody>
+          <a:bodyPr wrap="square" rtlCol="0" anchor="t">
+            <a:normAutofit/>
+          </a:bodyPr>
+          <a:lstStyle/>
+          <a:p>
+            <a:pPr indent="0" marL="0">
+              <a:buNone/>
+            </a:pPr>
+            <a:r>
+              <a:rPr lang="en-US" sz="2200" b="1" dirty="0">
+                <a:solidFill>
+                  <a:srgbClr val="1A1A1A"/>
+                </a:solidFill>
+                <a:latin typeface="Arial" pitchFamily="34" charset="0"/>
+                <a:ea typeface="Arial" pitchFamily="34" charset="-122"/>
+                <a:cs typeface="Arial" pitchFamily="34" charset="-120"/>
+              </a:rPr>
+              <a:t>Por que logotipos importam</a:t>
+            </a:r>
+            <a:endParaRPr lang="en-US" sz="2200" dirty="0"/>
+          </a:p>
+        </p:txBody>
+      </p:sp>
+      <p:sp>
+        <p:nvSpPr>
+          <p:cNvPr id="5" name="Text 3"/>
+          <p:cNvSpPr/>
+          <p:nvPr/>
+        </p:nvSpPr>
+        <p:spPr>
+          <a:xfrm>
+            <a:off x="457200" y="1481328"/>
+            <a:ext cx="10972800" cy="668528"/>
+          </a:xfrm>
+          <a:prstGeom prst="rect">
+            <a:avLst/>
+          </a:prstGeom>
+          <a:noFill/>
+          <a:ln/>
+        </p:spPr>
+        <p:txBody>
+          <a:bodyPr wrap="square" rtlCol="0" anchor="t">
+            <a:normAutofit/>
+          </a:bodyPr>
+          <a:lstStyle/>
+          <a:p>
+            <a:pPr indent="0" marL="0">
+              <a:buNone/>
+            </a:pPr>
+            <a:r>
+              <a:rPr lang="en-US" sz="2200" b="1" dirty="0">
+                <a:solidFill>
+                  <a:srgbClr val="1A1A1A"/>
+                </a:solidFill>
+                <a:latin typeface="Arial" pitchFamily="34" charset="0"/>
+                <a:ea typeface="Arial" pitchFamily="34" charset="-122"/>
+                <a:cs typeface="Arial" pitchFamily="34" charset="-120"/>
+              </a:rPr>
+              <a:t>O tempo que os consumidores levam para formar uma primeira impressão de um negócio.</a:t>
+            </a:r>
+            <a:endParaRPr lang="en-US" sz="2200" dirty="0"/>
+          </a:p>
+        </p:txBody>
+      </p:sp>
+      <p:sp>
+        <p:nvSpPr>
+          <p:cNvPr id="6" name="Text 4"/>
+          <p:cNvSpPr/>
+          <p:nvPr/>
+        </p:nvSpPr>
+        <p:spPr>
+          <a:xfrm>
+            <a:off x="457200" y="2259584"/>
+            <a:ext cx="10972800" cy="502920"/>
+          </a:xfrm>
+          <a:prstGeom prst="rect">
+            <a:avLst/>
+          </a:prstGeom>
+          <a:noFill/>
+          <a:ln/>
+        </p:spPr>
+        <p:txBody>
+          <a:bodyPr wrap="square" rtlCol="0" anchor="t">
+            <a:normAutofit/>
+          </a:bodyPr>
+          <a:lstStyle/>
+          <a:p>
+            <a:pPr indent="0" marL="0">
+              <a:buNone/>
+            </a:pPr>
+            <a:r>
+              <a:rPr lang="en-US" sz="1300" dirty="0">
+                <a:solidFill>
+                  <a:srgbClr val="4A4A4A"/>
+                </a:solidFill>
+                <a:latin typeface="Arial" pitchFamily="34" charset="0"/>
+                <a:ea typeface="Arial" pitchFamily="34" charset="-122"/>
+                <a:cs typeface="Arial" pitchFamily="34" charset="-120"/>
+              </a:rPr>
+              <a:t>Um logotipo profissional é o sinal visual mais forte que molda essa impressão — e o cérebro decide se confia em um negócio nesse instante.</a:t>
+            </a:r>
+            <a:endParaRPr lang="en-US" sz="1300" dirty="0"/>
+          </a:p>
+        </p:txBody>
+      </p:sp>
+      <p:sp>
+        <p:nvSpPr>
+          <p:cNvPr id="7" name="Text 5"/>
+          <p:cNvSpPr/>
+          <p:nvPr/>
+        </p:nvSpPr>
+        <p:spPr>
+          <a:xfrm>
+            <a:off x="457200" y="2899664"/>
+            <a:ext cx="10972800" cy="502920"/>
+          </a:xfrm>
+          <a:prstGeom prst="rect">
+            <a:avLst/>
+          </a:prstGeom>
+          <a:noFill/>
+          <a:ln/>
+        </p:spPr>
+        <p:txBody>
+          <a:bodyPr wrap="square" rtlCol="0" anchor="t">
+            <a:normAutofit/>
+          </a:bodyPr>
+          <a:lstStyle/>
+          <a:p>
+            <a:pPr indent="0" marL="0">
+              <a:buNone/>
+            </a:pPr>
+            <a:r>
+              <a:rPr lang="en-US" sz="1600" b="1" dirty="0">
+                <a:solidFill>
+                  <a:srgbClr val="1A1A1A"/>
+                </a:solidFill>
+                <a:latin typeface="Arial" pitchFamily="34" charset="0"/>
+                <a:ea typeface="Arial" pitchFamily="34" charset="-122"/>
+                <a:cs typeface="Arial" pitchFamily="34" charset="-120"/>
+              </a:rPr>
+              <a:t>Aumento de reconhecimento</a:t>
+            </a:r>
+            <a:endParaRPr lang="en-US" sz="1600" dirty="0"/>
+          </a:p>
+        </p:txBody>
+      </p:sp>
+      <p:sp>
+        <p:nvSpPr>
+          <p:cNvPr id="8" name="Text 6"/>
+          <p:cNvSpPr/>
+          <p:nvPr/>
+        </p:nvSpPr>
+        <p:spPr>
+          <a:xfrm>
+            <a:off x="457200" y="3512312"/>
+            <a:ext cx="10972800" cy="502920"/>
+          </a:xfrm>
+          <a:prstGeom prst="rect">
+            <a:avLst/>
+          </a:prstGeom>
+          <a:noFill/>
+          <a:ln/>
+        </p:spPr>
+        <p:txBody>
+          <a:bodyPr wrap="square" rtlCol="0" anchor="t">
+            <a:normAutofit/>
+          </a:bodyPr>
+          <a:lstStyle/>
+          <a:p>
+            <a:pPr indent="0" marL="0">
+              <a:buNone/>
+            </a:pPr>
+            <a:r>
+              <a:rPr lang="en-US" sz="1300" dirty="0">
+                <a:solidFill>
+                  <a:srgbClr val="4A4A4A"/>
+                </a:solidFill>
+                <a:latin typeface="Arial" pitchFamily="34" charset="0"/>
+                <a:ea typeface="Arial" pitchFamily="34" charset="-122"/>
+                <a:cs typeface="Arial" pitchFamily="34" charset="-120"/>
+              </a:rPr>
+              <a:t>Aumento do reconhecimento de marca com um logotipo bem projetado.</a:t>
+            </a:r>
+            <a:endParaRPr lang="en-US" sz="1300" dirty="0"/>
+          </a:p>
+        </p:txBody>
+      </p:sp>
+      <p:sp>
+        <p:nvSpPr>
+          <p:cNvPr id="9" name="Text 7"/>
+          <p:cNvSpPr/>
+          <p:nvPr/>
+        </p:nvSpPr>
+        <p:spPr>
+          <a:xfrm>
+            <a:off x="457200" y="4152392"/>
+            <a:ext cx="10972800" cy="502920"/>
+          </a:xfrm>
+          <a:prstGeom prst="rect">
+            <a:avLst/>
+          </a:prstGeom>
+          <a:noFill/>
+          <a:ln/>
+        </p:spPr>
+        <p:txBody>
+          <a:bodyPr wrap="square" rtlCol="0" anchor="t">
+            <a:normAutofit/>
+          </a:bodyPr>
+          <a:lstStyle/>
+          <a:p>
+            <a:pPr indent="0" marL="0">
+              <a:buNone/>
+            </a:pPr>
+            <a:r>
+              <a:rPr lang="en-US" sz="1600" b="1" dirty="0">
+                <a:solidFill>
+                  <a:srgbClr val="1A1A1A"/>
+                </a:solidFill>
+                <a:latin typeface="Arial" pitchFamily="34" charset="0"/>
+                <a:ea typeface="Arial" pitchFamily="34" charset="-122"/>
+                <a:cs typeface="Arial" pitchFamily="34" charset="-120"/>
+              </a:rPr>
+              <a:t>Impulso de confiança</a:t>
+            </a:r>
+            <a:endParaRPr lang="en-US" sz="1600" dirty="0"/>
+          </a:p>
+        </p:txBody>
+      </p:sp>
+      <p:sp>
+        <p:nvSpPr>
+          <p:cNvPr id="10" name="Text 8"/>
+          <p:cNvSpPr/>
+          <p:nvPr/>
+        </p:nvSpPr>
+        <p:spPr>
+          <a:xfrm>
+            <a:off x="457200" y="4765040"/>
+            <a:ext cx="10972800" cy="502920"/>
+          </a:xfrm>
+          <a:prstGeom prst="rect">
+            <a:avLst/>
+          </a:prstGeom>
+          <a:noFill/>
+          <a:ln/>
+        </p:spPr>
+        <p:txBody>
+          <a:bodyPr wrap="square" rtlCol="0" anchor="t">
+            <a:normAutofit/>
+          </a:bodyPr>
+          <a:lstStyle/>
+          <a:p>
+            <a:pPr indent="0" marL="0">
+              <a:buNone/>
+            </a:pPr>
+            <a:r>
+              <a:rPr lang="en-US" sz="1300" dirty="0">
+                <a:solidFill>
+                  <a:srgbClr val="4A4A4A"/>
+                </a:solidFill>
+                <a:latin typeface="Arial" pitchFamily="34" charset="0"/>
+                <a:ea typeface="Arial" pitchFamily="34" charset="-122"/>
+                <a:cs typeface="Arial" pitchFamily="34" charset="-120"/>
+              </a:rPr>
+              <a:t>Aumento de confiança que os prospects sentem ao ver um logotipo refinado.</a:t>
+            </a:r>
+            <a:endParaRPr lang="en-US" sz="1300" dirty="0"/>
+          </a:p>
+        </p:txBody>
+      </p:sp>
+      <p:sp>
+        <p:nvSpPr>
+          <p:cNvPr id="11" name="Text 9"/>
+          <p:cNvSpPr/>
+          <p:nvPr/>
+        </p:nvSpPr>
+        <p:spPr>
+          <a:xfrm>
+            <a:off x="457200" y="5405120"/>
+            <a:ext cx="10972800" cy="502920"/>
+          </a:xfrm>
+          <a:prstGeom prst="rect">
+            <a:avLst/>
+          </a:prstGeom>
+          <a:noFill/>
+          <a:ln/>
+        </p:spPr>
+        <p:txBody>
+          <a:bodyPr wrap="square" rtlCol="0" anchor="t">
+            <a:normAutofit/>
+          </a:bodyPr>
+          <a:lstStyle/>
+          <a:p>
+            <a:pPr indent="0" marL="0">
+              <a:buNone/>
+            </a:pPr>
+            <a:r>
+              <a:rPr lang="en-US" sz="1600" b="1" dirty="0">
+                <a:solidFill>
+                  <a:srgbClr val="1A1A1A"/>
+                </a:solidFill>
+                <a:latin typeface="Arial" pitchFamily="34" charset="0"/>
+                <a:ea typeface="Arial" pitchFamily="34" charset="-122"/>
+                <a:cs typeface="Arial" pitchFamily="34" charset="-120"/>
+              </a:rPr>
+              <a:t>Peso da impressão</a:t>
+            </a:r>
+            <a:endParaRPr lang="en-US" sz="1600" dirty="0"/>
+          </a:p>
+        </p:txBody>
+      </p:sp>
+      <p:sp>
+        <p:nvSpPr>
+          <p:cNvPr id="12" name="Text 10"/>
+          <p:cNvSpPr/>
+          <p:nvPr/>
+        </p:nvSpPr>
+        <p:spPr>
+          <a:xfrm>
+            <a:off x="457200" y="6017768"/>
+            <a:ext cx="10972800" cy="502920"/>
+          </a:xfrm>
+          <a:prstGeom prst="rect">
+            <a:avLst/>
+          </a:prstGeom>
+          <a:noFill/>
+          <a:ln/>
+        </p:spPr>
+        <p:txBody>
+          <a:bodyPr wrap="square" rtlCol="0" anchor="t">
+            <a:normAutofit/>
+          </a:bodyPr>
+          <a:lstStyle/>
+          <a:p>
+            <a:pPr indent="0" marL="0">
+              <a:buNone/>
+            </a:pPr>
+            <a:r>
+              <a:rPr lang="en-US" sz="1300" dirty="0">
+                <a:solidFill>
+                  <a:srgbClr val="4A4A4A"/>
+                </a:solidFill>
+                <a:latin typeface="Arial" pitchFamily="34" charset="0"/>
+                <a:ea typeface="Arial" pitchFamily="34" charset="-122"/>
+                <a:cs typeface="Arial" pitchFamily="34" charset="-120"/>
+              </a:rPr>
+              <a:t>Parcela do peso da primeira impressão impulsionada apenas pela cor do logotipo.</a:t>
+            </a:r>
+            <a:endParaRPr lang="en-US" sz="1300" dirty="0"/>
+          </a:p>
+        </p:txBody>
+      </p:sp>
     </p:spTree>
   </p:cSld>
   <p:clrMapOvr>
@@ -2932,6 +4578,375 @@
           </a:p>
         </p:txBody>
       </p:sp>
+      <p:sp>
+        <p:nvSpPr>
+          <p:cNvPr id="4" name="Text 2"/>
+          <p:cNvSpPr/>
+          <p:nvPr/>
+        </p:nvSpPr>
+        <p:spPr>
+          <a:xfrm>
+            <a:off x="457200" y="868680"/>
+            <a:ext cx="10972800" cy="502920"/>
+          </a:xfrm>
+          <a:prstGeom prst="rect">
+            <a:avLst/>
+          </a:prstGeom>
+          <a:noFill/>
+          <a:ln/>
+        </p:spPr>
+        <p:txBody>
+          <a:bodyPr wrap="square" rtlCol="0" anchor="t">
+            <a:normAutofit/>
+          </a:bodyPr>
+          <a:lstStyle/>
+          <a:p>
+            <a:pPr indent="0" marL="0">
+              <a:buNone/>
+            </a:pPr>
+            <a:r>
+              <a:rPr lang="en-US" sz="2200" b="1" dirty="0">
+                <a:solidFill>
+                  <a:srgbClr val="1A1A1A"/>
+                </a:solidFill>
+                <a:latin typeface="Arial" pitchFamily="34" charset="0"/>
+                <a:ea typeface="Arial" pitchFamily="34" charset="-122"/>
+                <a:cs typeface="Arial" pitchFamily="34" charset="-120"/>
+              </a:rPr>
+              <a:t>O que está em jogo</a:t>
+            </a:r>
+            <a:endParaRPr lang="en-US" sz="2200" dirty="0"/>
+          </a:p>
+        </p:txBody>
+      </p:sp>
+      <p:sp>
+        <p:nvSpPr>
+          <p:cNvPr id="5" name="Text 3"/>
+          <p:cNvSpPr/>
+          <p:nvPr/>
+        </p:nvSpPr>
+        <p:spPr>
+          <a:xfrm>
+            <a:off x="457200" y="1481328"/>
+            <a:ext cx="10972800" cy="502920"/>
+          </a:xfrm>
+          <a:prstGeom prst="rect">
+            <a:avLst/>
+          </a:prstGeom>
+          <a:noFill/>
+          <a:ln/>
+        </p:spPr>
+        <p:txBody>
+          <a:bodyPr wrap="square" rtlCol="0" anchor="t">
+            <a:normAutofit/>
+          </a:bodyPr>
+          <a:lstStyle/>
+          <a:p>
+            <a:pPr indent="0" marL="0">
+              <a:buNone/>
+            </a:pPr>
+            <a:r>
+              <a:rPr lang="en-US" sz="2200" b="1" dirty="0">
+                <a:solidFill>
+                  <a:srgbClr val="1A1A1A"/>
+                </a:solidFill>
+                <a:latin typeface="Arial" pitchFamily="34" charset="0"/>
+                <a:ea typeface="Arial" pitchFamily="34" charset="-122"/>
+                <a:cs typeface="Arial" pitchFamily="34" charset="-120"/>
+              </a:rPr>
+              <a:t>O custo de um logotipo fraco ou ausente.</a:t>
+            </a:r>
+            <a:endParaRPr lang="en-US" sz="2200" dirty="0"/>
+          </a:p>
+        </p:txBody>
+      </p:sp>
+      <p:sp>
+        <p:nvSpPr>
+          <p:cNvPr id="6" name="Text 4"/>
+          <p:cNvSpPr/>
+          <p:nvPr/>
+        </p:nvSpPr>
+        <p:spPr>
+          <a:xfrm>
+            <a:off x="457200" y="2093976"/>
+            <a:ext cx="10972800" cy="502920"/>
+          </a:xfrm>
+          <a:prstGeom prst="rect">
+            <a:avLst/>
+          </a:prstGeom>
+          <a:noFill/>
+          <a:ln/>
+        </p:spPr>
+        <p:txBody>
+          <a:bodyPr wrap="square" rtlCol="0" anchor="t">
+            <a:normAutofit/>
+          </a:bodyPr>
+          <a:lstStyle/>
+          <a:p>
+            <a:pPr indent="0" marL="0">
+              <a:buNone/>
+            </a:pPr>
+            <a:r>
+              <a:rPr lang="en-US" sz="1600" b="1" dirty="0">
+                <a:solidFill>
+                  <a:srgbClr val="1A1A1A"/>
+                </a:solidFill>
+                <a:latin typeface="Arial" pitchFamily="34" charset="0"/>
+                <a:ea typeface="Arial" pitchFamily="34" charset="-122"/>
+                <a:cs typeface="Arial" pitchFamily="34" charset="-120"/>
+              </a:rPr>
+              <a:t>Custo 01</a:t>
+            </a:r>
+            <a:endParaRPr lang="en-US" sz="1600" dirty="0"/>
+          </a:p>
+        </p:txBody>
+      </p:sp>
+      <p:sp>
+        <p:nvSpPr>
+          <p:cNvPr id="7" name="Text 5"/>
+          <p:cNvSpPr/>
+          <p:nvPr/>
+        </p:nvSpPr>
+        <p:spPr>
+          <a:xfrm>
+            <a:off x="457200" y="2706624"/>
+            <a:ext cx="10972800" cy="502920"/>
+          </a:xfrm>
+          <a:prstGeom prst="rect">
+            <a:avLst/>
+          </a:prstGeom>
+          <a:noFill/>
+          <a:ln/>
+        </p:spPr>
+        <p:txBody>
+          <a:bodyPr wrap="square" rtlCol="0" anchor="t">
+            <a:normAutofit/>
+          </a:bodyPr>
+          <a:lstStyle/>
+          <a:p>
+            <a:pPr indent="0" marL="0">
+              <a:buNone/>
+            </a:pPr>
+            <a:r>
+              <a:rPr lang="en-US" sz="1600" b="1" dirty="0">
+                <a:solidFill>
+                  <a:srgbClr val="1A1A1A"/>
+                </a:solidFill>
+                <a:latin typeface="Arial" pitchFamily="34" charset="0"/>
+                <a:ea typeface="Arial" pitchFamily="34" charset="-122"/>
+                <a:cs typeface="Arial" pitchFamily="34" charset="-120"/>
+              </a:rPr>
+              <a:t>Credibilidade perdida</a:t>
+            </a:r>
+            <a:endParaRPr lang="en-US" sz="1600" dirty="0"/>
+          </a:p>
+        </p:txBody>
+      </p:sp>
+      <p:sp>
+        <p:nvSpPr>
+          <p:cNvPr id="8" name="Text 6"/>
+          <p:cNvSpPr/>
+          <p:nvPr/>
+        </p:nvSpPr>
+        <p:spPr>
+          <a:xfrm>
+            <a:off x="457200" y="3319272"/>
+            <a:ext cx="10972800" cy="502920"/>
+          </a:xfrm>
+          <a:prstGeom prst="rect">
+            <a:avLst/>
+          </a:prstGeom>
+          <a:noFill/>
+          <a:ln/>
+        </p:spPr>
+        <p:txBody>
+          <a:bodyPr wrap="square" rtlCol="0" anchor="t">
+            <a:normAutofit/>
+          </a:bodyPr>
+          <a:lstStyle/>
+          <a:p>
+            <a:pPr indent="0" marL="0">
+              <a:buNone/>
+            </a:pPr>
+            <a:r>
+              <a:rPr lang="en-US" sz="1300" dirty="0">
+                <a:solidFill>
+                  <a:srgbClr val="4A4A4A"/>
+                </a:solidFill>
+                <a:latin typeface="Arial" pitchFamily="34" charset="0"/>
+                <a:ea typeface="Arial" pitchFamily="34" charset="-122"/>
+                <a:cs typeface="Arial" pitchFamily="34" charset="-120"/>
+              </a:rPr>
+              <a:t>Um logotipo faz um negócio parecer estabelecido. Sem um, os prospects optam pelo concorrente que parece mais profissional.</a:t>
+            </a:r>
+            <a:endParaRPr lang="en-US" sz="1300" dirty="0"/>
+          </a:p>
+        </p:txBody>
+      </p:sp>
+      <p:sp>
+        <p:nvSpPr>
+          <p:cNvPr id="9" name="Text 7"/>
+          <p:cNvSpPr/>
+          <p:nvPr/>
+        </p:nvSpPr>
+        <p:spPr>
+          <a:xfrm>
+            <a:off x="457200" y="3959352"/>
+            <a:ext cx="10972800" cy="502920"/>
+          </a:xfrm>
+          <a:prstGeom prst="rect">
+            <a:avLst/>
+          </a:prstGeom>
+          <a:noFill/>
+          <a:ln/>
+        </p:spPr>
+        <p:txBody>
+          <a:bodyPr wrap="square" rtlCol="0" anchor="t">
+            <a:normAutofit/>
+          </a:bodyPr>
+          <a:lstStyle/>
+          <a:p>
+            <a:pPr indent="0" marL="0">
+              <a:buNone/>
+            </a:pPr>
+            <a:r>
+              <a:rPr lang="en-US" sz="1600" b="1" dirty="0">
+                <a:solidFill>
+                  <a:srgbClr val="1A1A1A"/>
+                </a:solidFill>
+                <a:latin typeface="Arial" pitchFamily="34" charset="0"/>
+                <a:ea typeface="Arial" pitchFamily="34" charset="-122"/>
+                <a:cs typeface="Arial" pitchFamily="34" charset="-120"/>
+              </a:rPr>
+              <a:t>Custo 02</a:t>
+            </a:r>
+            <a:endParaRPr lang="en-US" sz="1600" dirty="0"/>
+          </a:p>
+        </p:txBody>
+      </p:sp>
+      <p:sp>
+        <p:nvSpPr>
+          <p:cNvPr id="10" name="Text 8"/>
+          <p:cNvSpPr/>
+          <p:nvPr/>
+        </p:nvSpPr>
+        <p:spPr>
+          <a:xfrm>
+            <a:off x="457200" y="4572000"/>
+            <a:ext cx="10972800" cy="502920"/>
+          </a:xfrm>
+          <a:prstGeom prst="rect">
+            <a:avLst/>
+          </a:prstGeom>
+          <a:noFill/>
+          <a:ln/>
+        </p:spPr>
+        <p:txBody>
+          <a:bodyPr wrap="square" rtlCol="0" anchor="t">
+            <a:normAutofit/>
+          </a:bodyPr>
+          <a:lstStyle/>
+          <a:p>
+            <a:pPr indent="0" marL="0">
+              <a:buNone/>
+            </a:pPr>
+            <a:r>
+              <a:rPr lang="en-US" sz="1600" b="1" dirty="0">
+                <a:solidFill>
+                  <a:srgbClr val="1A1A1A"/>
+                </a:solidFill>
+                <a:latin typeface="Arial" pitchFamily="34" charset="0"/>
+                <a:ea typeface="Arial" pitchFamily="34" charset="-122"/>
+                <a:cs typeface="Arial" pitchFamily="34" charset="-120"/>
+              </a:rPr>
+              <a:t>Diferenciação perdida</a:t>
+            </a:r>
+            <a:endParaRPr lang="en-US" sz="1600" dirty="0"/>
+          </a:p>
+        </p:txBody>
+      </p:sp>
+      <p:sp>
+        <p:nvSpPr>
+          <p:cNvPr id="11" name="Text 9"/>
+          <p:cNvSpPr/>
+          <p:nvPr/>
+        </p:nvSpPr>
+        <p:spPr>
+          <a:xfrm>
+            <a:off x="457200" y="5184648"/>
+            <a:ext cx="10972800" cy="502920"/>
+          </a:xfrm>
+          <a:prstGeom prst="rect">
+            <a:avLst/>
+          </a:prstGeom>
+          <a:noFill/>
+          <a:ln/>
+        </p:spPr>
+        <p:txBody>
+          <a:bodyPr wrap="square" rtlCol="0" anchor="t">
+            <a:normAutofit/>
+          </a:bodyPr>
+          <a:lstStyle/>
+          <a:p>
+            <a:pPr indent="0" marL="0">
+              <a:buNone/>
+            </a:pPr>
+            <a:r>
+              <a:rPr lang="en-US" sz="1300" dirty="0">
+                <a:solidFill>
+                  <a:srgbClr val="4A4A4A"/>
+                </a:solidFill>
+                <a:latin typeface="Arial" pitchFamily="34" charset="0"/>
+                <a:ea typeface="Arial" pitchFamily="34" charset="-122"/>
+                <a:cs typeface="Arial" pitchFamily="34" charset="-120"/>
+              </a:rPr>
+              <a:t>Logotipos são como os clientes distinguem um negócio de outro. Uma marca genérica ou ausente significa que os clientes não conseguem encontrá-lo.</a:t>
+            </a:r>
+            <a:endParaRPr lang="en-US" sz="1300" dirty="0"/>
+          </a:p>
+        </p:txBody>
+      </p:sp>
+      <p:sp>
+        <p:nvSpPr>
+          <p:cNvPr id="12" name="Text 10"/>
+          <p:cNvSpPr/>
+          <p:nvPr/>
+        </p:nvSpPr>
+        <p:spPr>
+          <a:xfrm>
+            <a:off x="457200" y="5824728"/>
+            <a:ext cx="10972800" cy="502920"/>
+          </a:xfrm>
+          <a:prstGeom prst="rect">
+            <a:avLst/>
+          </a:prstGeom>
+          <a:noFill/>
+          <a:ln/>
+        </p:spPr>
+        <p:txBody>
+          <a:bodyPr wrap="square" rtlCol="0" anchor="t">
+            <a:normAutofit/>
+          </a:bodyPr>
+          <a:lstStyle/>
+          <a:p>
+            <a:pPr indent="0" marL="0">
+              <a:buNone/>
+            </a:pPr>
+            <a:r>
+              <a:rPr lang="en-US" sz="1600" b="1" dirty="0">
+                <a:solidFill>
+                  <a:srgbClr val="1A1A1A"/>
+                </a:solidFill>
+                <a:latin typeface="Arial" pitchFamily="34" charset="0"/>
+                <a:ea typeface="Arial" pitchFamily="34" charset="-122"/>
+                <a:cs typeface="Arial" pitchFamily="34" charset="-120"/>
+              </a:rPr>
+              <a:t>Custo 03</a:t>
+            </a:r>
+            <a:endParaRPr lang="en-US" sz="1600" dirty="0"/>
+          </a:p>
+        </p:txBody>
+      </p:sp>
     </p:spTree>
   </p:cSld>
   <p:clrMapOvr>
@@ -3042,9 +5057,378 @@
           </a:p>
         </p:txBody>
       </p:sp>
+      <p:sp>
+        <p:nvSpPr>
+          <p:cNvPr id="4" name="Text 2"/>
+          <p:cNvSpPr/>
+          <p:nvPr/>
+        </p:nvSpPr>
+        <p:spPr>
+          <a:xfrm>
+            <a:off x="457200" y="868680"/>
+            <a:ext cx="6949440" cy="502920"/>
+          </a:xfrm>
+          <a:prstGeom prst="rect">
+            <a:avLst/>
+          </a:prstGeom>
+          <a:noFill/>
+          <a:ln/>
+        </p:spPr>
+        <p:txBody>
+          <a:bodyPr wrap="square" rtlCol="0" anchor="t">
+            <a:normAutofit/>
+          </a:bodyPr>
+          <a:lstStyle/>
+          <a:p>
+            <a:pPr indent="0" marL="0">
+              <a:buNone/>
+            </a:pPr>
+            <a:r>
+              <a:rPr lang="en-US" sz="2200" b="1" dirty="0">
+                <a:solidFill>
+                  <a:srgbClr val="1A1A1A"/>
+                </a:solidFill>
+                <a:latin typeface="Arial" pitchFamily="34" charset="0"/>
+                <a:ea typeface="Arial" pitchFamily="34" charset="-122"/>
+                <a:cs typeface="Arial" pitchFamily="34" charset="-120"/>
+              </a:rPr>
+              <a:t>O produto</a:t>
+            </a:r>
+            <a:endParaRPr lang="en-US" sz="2200" dirty="0"/>
+          </a:p>
+        </p:txBody>
+      </p:sp>
+      <p:sp>
+        <p:nvSpPr>
+          <p:cNvPr id="5" name="Text 3"/>
+          <p:cNvSpPr/>
+          <p:nvPr/>
+        </p:nvSpPr>
+        <p:spPr>
+          <a:xfrm>
+            <a:off x="457200" y="1481328"/>
+            <a:ext cx="6949440" cy="502920"/>
+          </a:xfrm>
+          <a:prstGeom prst="rect">
+            <a:avLst/>
+          </a:prstGeom>
+          <a:noFill/>
+          <a:ln/>
+        </p:spPr>
+        <p:txBody>
+          <a:bodyPr wrap="square" rtlCol="0" anchor="t">
+            <a:normAutofit/>
+          </a:bodyPr>
+          <a:lstStyle/>
+          <a:p>
+            <a:pPr indent="0" marL="0">
+              <a:buNone/>
+            </a:pPr>
+            <a:r>
+              <a:rPr lang="en-US" sz="2200" b="1" dirty="0">
+                <a:solidFill>
+                  <a:srgbClr val="1A1A1A"/>
+                </a:solidFill>
+                <a:latin typeface="Arial" pitchFamily="34" charset="0"/>
+                <a:ea typeface="Arial" pitchFamily="34" charset="-122"/>
+                <a:cs typeface="Arial" pitchFamily="34" charset="-120"/>
+              </a:rPr>
+              <a:t>O que o torna diferente.</a:t>
+            </a:r>
+            <a:endParaRPr lang="en-US" sz="2200" dirty="0"/>
+          </a:p>
+        </p:txBody>
+      </p:sp>
+      <p:sp>
+        <p:nvSpPr>
+          <p:cNvPr id="6" name="Text 4"/>
+          <p:cNvSpPr/>
+          <p:nvPr/>
+        </p:nvSpPr>
+        <p:spPr>
+          <a:xfrm>
+            <a:off x="457200" y="2093976"/>
+            <a:ext cx="6949440" cy="502920"/>
+          </a:xfrm>
+          <a:prstGeom prst="rect">
+            <a:avLst/>
+          </a:prstGeom>
+          <a:noFill/>
+          <a:ln/>
+        </p:spPr>
+        <p:txBody>
+          <a:bodyPr wrap="square" rtlCol="0" anchor="t">
+            <a:normAutofit/>
+          </a:bodyPr>
+          <a:lstStyle/>
+          <a:p>
+            <a:pPr indent="0" marL="0">
+              <a:buNone/>
+            </a:pPr>
+            <a:r>
+              <a:rPr lang="en-US" sz="1300" dirty="0">
+                <a:solidFill>
+                  <a:srgbClr val="4A4A4A"/>
+                </a:solidFill>
+                <a:latin typeface="Arial" pitchFamily="34" charset="0"/>
+                <a:ea typeface="Arial" pitchFamily="34" charset="-122"/>
+                <a:cs typeface="Arial" pitchFamily="34" charset="-120"/>
+              </a:rPr>
+              <a:t>Quatro fundamentos do produto que separam o Design de Logotipo Profissional de ferramentas gratuitas, freelancers e geradores de IA.</a:t>
+            </a:r>
+            <a:endParaRPr lang="en-US" sz="1300" dirty="0"/>
+          </a:p>
+        </p:txBody>
+      </p:sp>
+      <p:sp>
+        <p:nvSpPr>
+          <p:cNvPr id="7" name="Text 5"/>
+          <p:cNvSpPr/>
+          <p:nvPr/>
+        </p:nvSpPr>
+        <p:spPr>
+          <a:xfrm>
+            <a:off x="457200" y="2734056"/>
+            <a:ext cx="6949440" cy="502920"/>
+          </a:xfrm>
+          <a:prstGeom prst="rect">
+            <a:avLst/>
+          </a:prstGeom>
+          <a:noFill/>
+          <a:ln/>
+        </p:spPr>
+        <p:txBody>
+          <a:bodyPr wrap="square" rtlCol="0" anchor="t">
+            <a:normAutofit/>
+          </a:bodyPr>
+          <a:lstStyle/>
+          <a:p>
+            <a:pPr indent="0" marL="0">
+              <a:buNone/>
+            </a:pPr>
+            <a:r>
+              <a:rPr lang="en-US" sz="1600" b="1" dirty="0">
+                <a:solidFill>
+                  <a:srgbClr val="1A1A1A"/>
+                </a:solidFill>
+                <a:latin typeface="Arial" pitchFamily="34" charset="0"/>
+                <a:ea typeface="Arial" pitchFamily="34" charset="-122"/>
+                <a:cs typeface="Arial" pitchFamily="34" charset="-120"/>
+              </a:rPr>
+              <a:t>Pessoas, não prompts.</a:t>
+            </a:r>
+            <a:endParaRPr lang="en-US" sz="1600" dirty="0"/>
+          </a:p>
+        </p:txBody>
+      </p:sp>
+      <p:sp>
+        <p:nvSpPr>
+          <p:cNvPr id="8" name="Text 6"/>
+          <p:cNvSpPr/>
+          <p:nvPr/>
+        </p:nvSpPr>
+        <p:spPr>
+          <a:xfrm>
+            <a:off x="457200" y="3346704"/>
+            <a:ext cx="6949440" cy="605028"/>
+          </a:xfrm>
+          <a:prstGeom prst="rect">
+            <a:avLst/>
+          </a:prstGeom>
+          <a:noFill/>
+          <a:ln/>
+        </p:spPr>
+        <p:txBody>
+          <a:bodyPr wrap="square" rtlCol="0" anchor="t">
+            <a:normAutofit/>
+          </a:bodyPr>
+          <a:lstStyle/>
+          <a:p>
+            <a:pPr indent="0" marL="0">
+              <a:buNone/>
+            </a:pPr>
+            <a:r>
+              <a:rPr lang="en-US" sz="1300" dirty="0">
+                <a:solidFill>
+                  <a:srgbClr val="4A4A4A"/>
+                </a:solidFill>
+                <a:latin typeface="Arial" pitchFamily="34" charset="0"/>
+                <a:ea typeface="Arial" pitchFamily="34" charset="-122"/>
+                <a:cs typeface="Arial" pitchFamily="34" charset="-120"/>
+              </a:rPr>
+              <a:t>Mais de dez anos de experiência e mais de 75.000 logotipos entregues. Até 2025, 20% de todos os logotipos são gerados por IA — o que torna as marcas criadas por humanos mais diferenciadas, não menos.</a:t>
+            </a:r>
+            <a:endParaRPr lang="en-US" sz="1300" dirty="0"/>
+          </a:p>
+        </p:txBody>
+      </p:sp>
+      <p:sp>
+        <p:nvSpPr>
+          <p:cNvPr id="9" name="Text 7"/>
+          <p:cNvSpPr/>
+          <p:nvPr/>
+        </p:nvSpPr>
+        <p:spPr>
+          <a:xfrm>
+            <a:off x="457200" y="4088892"/>
+            <a:ext cx="6949440" cy="502920"/>
+          </a:xfrm>
+          <a:prstGeom prst="rect">
+            <a:avLst/>
+          </a:prstGeom>
+          <a:noFill/>
+          <a:ln/>
+        </p:spPr>
+        <p:txBody>
+          <a:bodyPr wrap="square" rtlCol="0" anchor="t">
+            <a:normAutofit/>
+          </a:bodyPr>
+          <a:lstStyle/>
+          <a:p>
+            <a:pPr indent="0" marL="0">
+              <a:buNone/>
+            </a:pPr>
+            <a:r>
+              <a:rPr lang="en-US" sz="1600" b="1" dirty="0">
+                <a:solidFill>
+                  <a:srgbClr val="1A1A1A"/>
+                </a:solidFill>
+                <a:latin typeface="Arial" pitchFamily="34" charset="0"/>
+                <a:ea typeface="Arial" pitchFamily="34" charset="-122"/>
+                <a:cs typeface="Arial" pitchFamily="34" charset="-120"/>
+              </a:rPr>
+              <a:t>O cliente é dono da marca por completo.</a:t>
+            </a:r>
+            <a:endParaRPr lang="en-US" sz="1600" dirty="0"/>
+          </a:p>
+        </p:txBody>
+      </p:sp>
+      <p:sp>
+        <p:nvSpPr>
+          <p:cNvPr id="10" name="Text 8"/>
+          <p:cNvSpPr/>
+          <p:nvPr/>
+        </p:nvSpPr>
+        <p:spPr>
+          <a:xfrm>
+            <a:off x="457200" y="4701540"/>
+            <a:ext cx="6949440" cy="605028"/>
+          </a:xfrm>
+          <a:prstGeom prst="rect">
+            <a:avLst/>
+          </a:prstGeom>
+          <a:noFill/>
+          <a:ln/>
+        </p:spPr>
+        <p:txBody>
+          <a:bodyPr wrap="square" rtlCol="0" anchor="t">
+            <a:normAutofit/>
+          </a:bodyPr>
+          <a:lstStyle/>
+          <a:p>
+            <a:pPr indent="0" marL="0">
+              <a:buNone/>
+            </a:pPr>
+            <a:r>
+              <a:rPr lang="en-US" sz="1300" dirty="0">
+                <a:solidFill>
+                  <a:srgbClr val="4A4A4A"/>
+                </a:solidFill>
+                <a:latin typeface="Arial" pitchFamily="34" charset="0"/>
+                <a:ea typeface="Arial" pitchFamily="34" charset="-122"/>
+                <a:cs typeface="Arial" pitchFamily="34" charset="-120"/>
+              </a:rPr>
+              <a:t>Registrável como marca. Livre de royalties. Uma carta formal de transferência de direitos acompanha cada projeto. Ferramentas gratuitas raramente transferem todos os direitos.</a:t>
+            </a:r>
+            <a:endParaRPr lang="en-US" sz="1300" dirty="0"/>
+          </a:p>
+        </p:txBody>
+      </p:sp>
+      <p:sp>
+        <p:nvSpPr>
+          <p:cNvPr id="11" name="Text 9"/>
+          <p:cNvSpPr/>
+          <p:nvPr/>
+        </p:nvSpPr>
+        <p:spPr>
+          <a:xfrm>
+            <a:off x="457200" y="5443728"/>
+            <a:ext cx="6949440" cy="502920"/>
+          </a:xfrm>
+          <a:prstGeom prst="rect">
+            <a:avLst/>
+          </a:prstGeom>
+          <a:noFill/>
+          <a:ln/>
+        </p:spPr>
+        <p:txBody>
+          <a:bodyPr wrap="square" rtlCol="0" anchor="t">
+            <a:normAutofit/>
+          </a:bodyPr>
+          <a:lstStyle/>
+          <a:p>
+            <a:pPr indent="0" marL="0">
+              <a:buNone/>
+            </a:pPr>
+            <a:r>
+              <a:rPr lang="en-US" sz="1600" b="1" dirty="0">
+                <a:solidFill>
+                  <a:srgbClr val="1A1A1A"/>
+                </a:solidFill>
+                <a:latin typeface="Arial" pitchFamily="34" charset="0"/>
+                <a:ea typeface="Arial" pitchFamily="34" charset="-122"/>
+                <a:cs typeface="Arial" pitchFamily="34" charset="-120"/>
+              </a:rPr>
+              <a:t>Pronto para cada aplicação.</a:t>
+            </a:r>
+            <a:endParaRPr lang="en-US" sz="1600" dirty="0"/>
+          </a:p>
+        </p:txBody>
+      </p:sp>
+      <p:sp>
+        <p:nvSpPr>
+          <p:cNvPr id="12" name="Text 10"/>
+          <p:cNvSpPr/>
+          <p:nvPr/>
+        </p:nvSpPr>
+        <p:spPr>
+          <a:xfrm>
+            <a:off x="457200" y="6056376"/>
+            <a:ext cx="6949440" cy="502920"/>
+          </a:xfrm>
+          <a:prstGeom prst="rect">
+            <a:avLst/>
+          </a:prstGeom>
+          <a:noFill/>
+          <a:ln/>
+        </p:spPr>
+        <p:txBody>
+          <a:bodyPr wrap="square" rtlCol="0" anchor="t">
+            <a:normAutofit/>
+          </a:bodyPr>
+          <a:lstStyle/>
+          <a:p>
+            <a:pPr indent="0" marL="0">
+              <a:buNone/>
+            </a:pPr>
+            <a:r>
+              <a:rPr lang="en-US" sz="1300" dirty="0">
+                <a:solidFill>
+                  <a:srgbClr val="4A4A4A"/>
+                </a:solidFill>
+                <a:latin typeface="Arial" pitchFamily="34" charset="0"/>
+                <a:ea typeface="Arial" pitchFamily="34" charset="-122"/>
+                <a:cs typeface="Arial" pitchFamily="34" charset="-120"/>
+              </a:rPr>
+              <a:t>AI, EPS, PDF, JPG, PNG, GIF e ICO — seis versões em cor e cinco em preto e branco. Web, impressão, merchandising, redes sociais, sinalização.</a:t>
+            </a:r>
+            <a:endParaRPr lang="en-US" sz="1300" dirty="0"/>
+          </a:p>
+        </p:txBody>
+      </p:sp>
       <p:pic>
         <p:nvPicPr>
-          <p:cNvPr id="4" name="Image 0" descr="preencoded.png">    </p:cNvPr>
+          <p:cNvPr id="13" name="Image 0" descr="preencoded.png">    </p:cNvPr>
           <p:cNvPicPr>
             <a:picLocks noChangeAspect="1"/>
           </p:cNvPicPr>
@@ -3058,8 +5442,8 @@
         </p:blipFill>
         <p:spPr>
           <a:xfrm>
-            <a:off x="7772400" y="1097280"/>
-            <a:ext cx="3657600" cy="2286000"/>
+            <a:off x="7680960" y="1005840"/>
+            <a:ext cx="3840480" cy="2560320"/>
           </a:xfrm>
           <a:prstGeom prst="rect">
             <a:avLst/>
@@ -3176,9 +5560,173 @@
           </a:p>
         </p:txBody>
       </p:sp>
+      <p:sp>
+        <p:nvSpPr>
+          <p:cNvPr id="4" name="Text 2"/>
+          <p:cNvSpPr/>
+          <p:nvPr/>
+        </p:nvSpPr>
+        <p:spPr>
+          <a:xfrm>
+            <a:off x="457200" y="868680"/>
+            <a:ext cx="6949440" cy="502920"/>
+          </a:xfrm>
+          <a:prstGeom prst="rect">
+            <a:avLst/>
+          </a:prstGeom>
+          <a:noFill/>
+          <a:ln/>
+        </p:spPr>
+        <p:txBody>
+          <a:bodyPr wrap="square" rtlCol="0" anchor="t">
+            <a:normAutofit/>
+          </a:bodyPr>
+          <a:lstStyle/>
+          <a:p>
+            <a:pPr indent="0" marL="0">
+              <a:buNone/>
+            </a:pPr>
+            <a:r>
+              <a:rPr lang="en-US" sz="2200" b="1" dirty="0">
+                <a:solidFill>
+                  <a:srgbClr val="1A1A1A"/>
+                </a:solidFill>
+                <a:latin typeface="Arial" pitchFamily="34" charset="0"/>
+                <a:ea typeface="Arial" pitchFamily="34" charset="-122"/>
+                <a:cs typeface="Arial" pitchFamily="34" charset="-120"/>
+              </a:rPr>
+              <a:t>Trabalhos selecionados</a:t>
+            </a:r>
+            <a:endParaRPr lang="en-US" sz="2200" dirty="0"/>
+          </a:p>
+        </p:txBody>
+      </p:sp>
+      <p:sp>
+        <p:nvSpPr>
+          <p:cNvPr id="5" name="Text 3"/>
+          <p:cNvSpPr/>
+          <p:nvPr/>
+        </p:nvSpPr>
+        <p:spPr>
+          <a:xfrm>
+            <a:off x="457200" y="1481328"/>
+            <a:ext cx="6949440" cy="502920"/>
+          </a:xfrm>
+          <a:prstGeom prst="rect">
+            <a:avLst/>
+          </a:prstGeom>
+          <a:noFill/>
+          <a:ln/>
+        </p:spPr>
+        <p:txBody>
+          <a:bodyPr wrap="square" rtlCol="0" anchor="t">
+            <a:normAutofit/>
+          </a:bodyPr>
+          <a:lstStyle/>
+          <a:p>
+            <a:pPr indent="0" marL="0">
+              <a:buNone/>
+            </a:pPr>
+            <a:r>
+              <a:rPr lang="en-US" sz="2200" b="1" dirty="0">
+                <a:solidFill>
+                  <a:srgbClr val="1A1A1A"/>
+                </a:solidFill>
+                <a:latin typeface="Arial" pitchFamily="34" charset="0"/>
+                <a:ea typeface="Arial" pitchFamily="34" charset="-122"/>
+                <a:cs typeface="Arial" pitchFamily="34" charset="-120"/>
+              </a:rPr>
+              <a:t>Algumas das marcas que criamos.</a:t>
+            </a:r>
+            <a:endParaRPr lang="en-US" sz="2200" dirty="0"/>
+          </a:p>
+        </p:txBody>
+      </p:sp>
+      <p:sp>
+        <p:nvSpPr>
+          <p:cNvPr id="6" name="Text 4"/>
+          <p:cNvSpPr/>
+          <p:nvPr/>
+        </p:nvSpPr>
+        <p:spPr>
+          <a:xfrm>
+            <a:off x="457200" y="2093976"/>
+            <a:ext cx="6949440" cy="502920"/>
+          </a:xfrm>
+          <a:prstGeom prst="rect">
+            <a:avLst/>
+          </a:prstGeom>
+          <a:noFill/>
+          <a:ln/>
+        </p:spPr>
+        <p:txBody>
+          <a:bodyPr wrap="square" rtlCol="0" anchor="t">
+            <a:normAutofit/>
+          </a:bodyPr>
+          <a:lstStyle/>
+          <a:p>
+            <a:pPr indent="0" marL="0">
+              <a:buNone/>
+            </a:pPr>
+            <a:r>
+              <a:rPr lang="en-US" sz="1600" b="1" dirty="0">
+                <a:solidFill>
+                  <a:srgbClr val="1A1A1A"/>
+                </a:solidFill>
+                <a:latin typeface="Arial" pitchFamily="34" charset="0"/>
+                <a:ea typeface="Arial" pitchFamily="34" charset="-122"/>
+                <a:cs typeface="Arial" pitchFamily="34" charset="-120"/>
+              </a:rPr>
+              <a:t>Logotipos entregues</a:t>
+            </a:r>
+            <a:endParaRPr lang="en-US" sz="1600" dirty="0"/>
+          </a:p>
+        </p:txBody>
+      </p:sp>
+      <p:sp>
+        <p:nvSpPr>
+          <p:cNvPr id="7" name="Text 5"/>
+          <p:cNvSpPr/>
+          <p:nvPr/>
+        </p:nvSpPr>
+        <p:spPr>
+          <a:xfrm>
+            <a:off x="457200" y="2706624"/>
+            <a:ext cx="6949440" cy="502920"/>
+          </a:xfrm>
+          <a:prstGeom prst="rect">
+            <a:avLst/>
+          </a:prstGeom>
+          <a:noFill/>
+          <a:ln/>
+        </p:spPr>
+        <p:txBody>
+          <a:bodyPr wrap="square" rtlCol="0" anchor="t">
+            <a:normAutofit/>
+          </a:bodyPr>
+          <a:lstStyle/>
+          <a:p>
+            <a:pPr indent="0" marL="0">
+              <a:buNone/>
+            </a:pPr>
+            <a:r>
+              <a:rPr lang="en-US" sz="1600" b="1" dirty="0">
+                <a:solidFill>
+                  <a:srgbClr val="1A1A1A"/>
+                </a:solidFill>
+                <a:latin typeface="Arial" pitchFamily="34" charset="0"/>
+                <a:ea typeface="Arial" pitchFamily="34" charset="-122"/>
+                <a:cs typeface="Arial" pitchFamily="34" charset="-120"/>
+              </a:rPr>
+              <a:t>Verticais</a:t>
+            </a:r>
+            <a:endParaRPr lang="en-US" sz="1600" dirty="0"/>
+          </a:p>
+        </p:txBody>
+      </p:sp>
       <p:pic>
         <p:nvPicPr>
-          <p:cNvPr id="4" name="Image 0" descr="preencoded.png">    </p:cNvPr>
+          <p:cNvPr id="8" name="Image 0" descr="preencoded.png">    </p:cNvPr>
           <p:cNvPicPr>
             <a:picLocks noChangeAspect="1"/>
           </p:cNvPicPr>
@@ -3192,8 +5740,200 @@
         </p:blipFill>
         <p:spPr>
           <a:xfrm>
-            <a:off x="7772400" y="1097280"/>
-            <a:ext cx="3657600" cy="2286000"/>
+            <a:off x="7498080" y="914400"/>
+            <a:ext cx="3474720" cy="1463040"/>
+          </a:xfrm>
+          <a:prstGeom prst="rect">
+            <a:avLst/>
+          </a:prstGeom>
+        </p:spPr>
+      </p:pic>
+      <p:pic>
+        <p:nvPicPr>
+          <p:cNvPr id="9" name="Image 1" descr="preencoded.png">    </p:cNvPr>
+          <p:cNvPicPr>
+            <a:picLocks noChangeAspect="1"/>
+          </p:cNvPicPr>
+          <p:nvPr/>
+        </p:nvPicPr>
+        <p:blipFill>
+          <a:blip r:embed="rId2"/>
+          <a:stretch>
+            <a:fillRect/>
+          </a:stretch>
+        </p:blipFill>
+        <p:spPr>
+          <a:xfrm>
+            <a:off x="11109960" y="914400"/>
+            <a:ext cx="3474720" cy="1463040"/>
+          </a:xfrm>
+          <a:prstGeom prst="rect">
+            <a:avLst/>
+          </a:prstGeom>
+        </p:spPr>
+      </p:pic>
+      <p:pic>
+        <p:nvPicPr>
+          <p:cNvPr id="10" name="Image 2" descr="preencoded.png">    </p:cNvPr>
+          <p:cNvPicPr>
+            <a:picLocks noChangeAspect="1"/>
+          </p:cNvPicPr>
+          <p:nvPr/>
+        </p:nvPicPr>
+        <p:blipFill>
+          <a:blip r:embed="rId3"/>
+          <a:stretch>
+            <a:fillRect/>
+          </a:stretch>
+        </p:blipFill>
+        <p:spPr>
+          <a:xfrm>
+            <a:off x="14721840" y="914400"/>
+            <a:ext cx="3474720" cy="1463040"/>
+          </a:xfrm>
+          <a:prstGeom prst="rect">
+            <a:avLst/>
+          </a:prstGeom>
+        </p:spPr>
+      </p:pic>
+      <p:pic>
+        <p:nvPicPr>
+          <p:cNvPr id="11" name="Image 3" descr="preencoded.png">    </p:cNvPr>
+          <p:cNvPicPr>
+            <a:picLocks noChangeAspect="1"/>
+          </p:cNvPicPr>
+          <p:nvPr/>
+        </p:nvPicPr>
+        <p:blipFill>
+          <a:blip r:embed="rId4"/>
+          <a:stretch>
+            <a:fillRect/>
+          </a:stretch>
+        </p:blipFill>
+        <p:spPr>
+          <a:xfrm>
+            <a:off x="7498080" y="2514600"/>
+            <a:ext cx="3474720" cy="1463040"/>
+          </a:xfrm>
+          <a:prstGeom prst="rect">
+            <a:avLst/>
+          </a:prstGeom>
+        </p:spPr>
+      </p:pic>
+      <p:pic>
+        <p:nvPicPr>
+          <p:cNvPr id="12" name="Image 4" descr="preencoded.png">    </p:cNvPr>
+          <p:cNvPicPr>
+            <a:picLocks noChangeAspect="1"/>
+          </p:cNvPicPr>
+          <p:nvPr/>
+        </p:nvPicPr>
+        <p:blipFill>
+          <a:blip r:embed="rId5"/>
+          <a:stretch>
+            <a:fillRect/>
+          </a:stretch>
+        </p:blipFill>
+        <p:spPr>
+          <a:xfrm>
+            <a:off x="11109960" y="2514600"/>
+            <a:ext cx="3474720" cy="1463040"/>
+          </a:xfrm>
+          <a:prstGeom prst="rect">
+            <a:avLst/>
+          </a:prstGeom>
+        </p:spPr>
+      </p:pic>
+      <p:pic>
+        <p:nvPicPr>
+          <p:cNvPr id="13" name="Image 5" descr="preencoded.png">    </p:cNvPr>
+          <p:cNvPicPr>
+            <a:picLocks noChangeAspect="1"/>
+          </p:cNvPicPr>
+          <p:nvPr/>
+        </p:nvPicPr>
+        <p:blipFill>
+          <a:blip r:embed="rId6"/>
+          <a:stretch>
+            <a:fillRect/>
+          </a:stretch>
+        </p:blipFill>
+        <p:spPr>
+          <a:xfrm>
+            <a:off x="14721840" y="2514600"/>
+            <a:ext cx="3474720" cy="1463040"/>
+          </a:xfrm>
+          <a:prstGeom prst="rect">
+            <a:avLst/>
+          </a:prstGeom>
+        </p:spPr>
+      </p:pic>
+      <p:pic>
+        <p:nvPicPr>
+          <p:cNvPr id="14" name="Image 6" descr="preencoded.png">    </p:cNvPr>
+          <p:cNvPicPr>
+            <a:picLocks noChangeAspect="1"/>
+          </p:cNvPicPr>
+          <p:nvPr/>
+        </p:nvPicPr>
+        <p:blipFill>
+          <a:blip r:embed="rId7"/>
+          <a:stretch>
+            <a:fillRect/>
+          </a:stretch>
+        </p:blipFill>
+        <p:spPr>
+          <a:xfrm>
+            <a:off x="7498080" y="4114800"/>
+            <a:ext cx="3474720" cy="1463040"/>
+          </a:xfrm>
+          <a:prstGeom prst="rect">
+            <a:avLst/>
+          </a:prstGeom>
+        </p:spPr>
+      </p:pic>
+      <p:pic>
+        <p:nvPicPr>
+          <p:cNvPr id="15" name="Image 7" descr="preencoded.png">    </p:cNvPr>
+          <p:cNvPicPr>
+            <a:picLocks noChangeAspect="1"/>
+          </p:cNvPicPr>
+          <p:nvPr/>
+        </p:nvPicPr>
+        <p:blipFill>
+          <a:blip r:embed="rId8"/>
+          <a:stretch>
+            <a:fillRect/>
+          </a:stretch>
+        </p:blipFill>
+        <p:spPr>
+          <a:xfrm>
+            <a:off x="11109960" y="4114800"/>
+            <a:ext cx="3474720" cy="1463040"/>
+          </a:xfrm>
+          <a:prstGeom prst="rect">
+            <a:avLst/>
+          </a:prstGeom>
+        </p:spPr>
+      </p:pic>
+      <p:pic>
+        <p:nvPicPr>
+          <p:cNvPr id="16" name="Image 8" descr="preencoded.png">    </p:cNvPr>
+          <p:cNvPicPr>
+            <a:picLocks noChangeAspect="1"/>
+          </p:cNvPicPr>
+          <p:nvPr/>
+        </p:nvPicPr>
+        <p:blipFill>
+          <a:blip r:embed="rId9"/>
+          <a:stretch>
+            <a:fillRect/>
+          </a:stretch>
+        </p:blipFill>
+        <p:spPr>
+          <a:xfrm>
+            <a:off x="14721840" y="4114800"/>
+            <a:ext cx="3474720" cy="1463040"/>
           </a:xfrm>
           <a:prstGeom prst="rect">
             <a:avLst/>
@@ -3310,9 +6050,378 @@
           </a:p>
         </p:txBody>
       </p:sp>
+      <p:sp>
+        <p:nvSpPr>
+          <p:cNvPr id="4" name="Text 2"/>
+          <p:cNvSpPr/>
+          <p:nvPr/>
+        </p:nvSpPr>
+        <p:spPr>
+          <a:xfrm>
+            <a:off x="457200" y="868680"/>
+            <a:ext cx="6949440" cy="502920"/>
+          </a:xfrm>
+          <a:prstGeom prst="rect">
+            <a:avLst/>
+          </a:prstGeom>
+          <a:noFill/>
+          <a:ln/>
+        </p:spPr>
+        <p:txBody>
+          <a:bodyPr wrap="square" rtlCol="0" anchor="t">
+            <a:normAutofit/>
+          </a:bodyPr>
+          <a:lstStyle/>
+          <a:p>
+            <a:pPr indent="0" marL="0">
+              <a:buNone/>
+            </a:pPr>
+            <a:r>
+              <a:rPr lang="en-US" sz="2200" b="1" dirty="0">
+                <a:solidFill>
+                  <a:srgbClr val="1A1A1A"/>
+                </a:solidFill>
+                <a:latin typeface="Arial" pitchFamily="34" charset="0"/>
+                <a:ea typeface="Arial" pitchFamily="34" charset="-122"/>
+                <a:cs typeface="Arial" pitchFamily="34" charset="-120"/>
+              </a:rPr>
+              <a:t>O processo criativo</a:t>
+            </a:r>
+            <a:endParaRPr lang="en-US" sz="2200" dirty="0"/>
+          </a:p>
+        </p:txBody>
+      </p:sp>
+      <p:sp>
+        <p:nvSpPr>
+          <p:cNvPr id="5" name="Text 3"/>
+          <p:cNvSpPr/>
+          <p:nvPr/>
+        </p:nvSpPr>
+        <p:spPr>
+          <a:xfrm>
+            <a:off x="457200" y="1481328"/>
+            <a:ext cx="6949440" cy="502920"/>
+          </a:xfrm>
+          <a:prstGeom prst="rect">
+            <a:avLst/>
+          </a:prstGeom>
+          <a:noFill/>
+          <a:ln/>
+        </p:spPr>
+        <p:txBody>
+          <a:bodyPr wrap="square" rtlCol="0" anchor="t">
+            <a:normAutofit/>
+          </a:bodyPr>
+          <a:lstStyle/>
+          <a:p>
+            <a:pPr indent="0" marL="0">
+              <a:buNone/>
+            </a:pPr>
+            <a:r>
+              <a:rPr lang="en-US" sz="2200" b="1" dirty="0">
+                <a:solidFill>
+                  <a:srgbClr val="1A1A1A"/>
+                </a:solidFill>
+                <a:latin typeface="Arial" pitchFamily="34" charset="0"/>
+                <a:ea typeface="Arial" pitchFamily="34" charset="-122"/>
+                <a:cs typeface="Arial" pitchFamily="34" charset="-120"/>
+              </a:rPr>
+              <a:t>Do briefing aos arquivos finais.</a:t>
+            </a:r>
+            <a:endParaRPr lang="en-US" sz="2200" dirty="0"/>
+          </a:p>
+        </p:txBody>
+      </p:sp>
+      <p:sp>
+        <p:nvSpPr>
+          <p:cNvPr id="6" name="Text 4"/>
+          <p:cNvSpPr/>
+          <p:nvPr/>
+        </p:nvSpPr>
+        <p:spPr>
+          <a:xfrm>
+            <a:off x="457200" y="2093976"/>
+            <a:ext cx="6949440" cy="502920"/>
+          </a:xfrm>
+          <a:prstGeom prst="rect">
+            <a:avLst/>
+          </a:prstGeom>
+          <a:noFill/>
+          <a:ln/>
+        </p:spPr>
+        <p:txBody>
+          <a:bodyPr wrap="square" rtlCol="0" anchor="t">
+            <a:normAutofit/>
+          </a:bodyPr>
+          <a:lstStyle/>
+          <a:p>
+            <a:pPr indent="0" marL="0">
+              <a:buNone/>
+            </a:pPr>
+            <a:r>
+              <a:rPr lang="en-US" sz="1600" b="1" dirty="0">
+                <a:solidFill>
+                  <a:srgbClr val="1A1A1A"/>
+                </a:solidFill>
+                <a:latin typeface="Arial" pitchFamily="34" charset="0"/>
+                <a:ea typeface="Arial" pitchFamily="34" charset="-122"/>
+                <a:cs typeface="Arial" pitchFamily="34" charset="-120"/>
+              </a:rPr>
+              <a:t>Compra e boas-vindas</a:t>
+            </a:r>
+            <a:endParaRPr lang="en-US" sz="1600" dirty="0"/>
+          </a:p>
+        </p:txBody>
+      </p:sp>
+      <p:sp>
+        <p:nvSpPr>
+          <p:cNvPr id="7" name="Text 5"/>
+          <p:cNvSpPr/>
+          <p:nvPr/>
+        </p:nvSpPr>
+        <p:spPr>
+          <a:xfrm>
+            <a:off x="457200" y="2706624"/>
+            <a:ext cx="6949440" cy="502920"/>
+          </a:xfrm>
+          <a:prstGeom prst="rect">
+            <a:avLst/>
+          </a:prstGeom>
+          <a:noFill/>
+          <a:ln/>
+        </p:spPr>
+        <p:txBody>
+          <a:bodyPr wrap="square" rtlCol="0" anchor="t">
+            <a:normAutofit/>
+          </a:bodyPr>
+          <a:lstStyle/>
+          <a:p>
+            <a:pPr indent="0" marL="0">
+              <a:buNone/>
+            </a:pPr>
+            <a:r>
+              <a:rPr lang="en-US" sz="1300" dirty="0">
+                <a:solidFill>
+                  <a:srgbClr val="4A4A4A"/>
+                </a:solidFill>
+                <a:latin typeface="Arial" pitchFamily="34" charset="0"/>
+                <a:ea typeface="Arial" pitchFamily="34" charset="-122"/>
+                <a:cs typeface="Arial" pitchFamily="34" charset="-120"/>
+              </a:rPr>
+              <a:t>O cliente compra um plano e recebe um e-mail de boas-vindas confirmando o pedido.</a:t>
+            </a:r>
+            <a:endParaRPr lang="en-US" sz="1300" dirty="0"/>
+          </a:p>
+        </p:txBody>
+      </p:sp>
+      <p:sp>
+        <p:nvSpPr>
+          <p:cNvPr id="8" name="Text 6"/>
+          <p:cNvSpPr/>
+          <p:nvPr/>
+        </p:nvSpPr>
+        <p:spPr>
+          <a:xfrm>
+            <a:off x="457200" y="3346704"/>
+            <a:ext cx="6949440" cy="502920"/>
+          </a:xfrm>
+          <a:prstGeom prst="rect">
+            <a:avLst/>
+          </a:prstGeom>
+          <a:noFill/>
+          <a:ln/>
+        </p:spPr>
+        <p:txBody>
+          <a:bodyPr wrap="square" rtlCol="0" anchor="t">
+            <a:normAutofit/>
+          </a:bodyPr>
+          <a:lstStyle/>
+          <a:p>
+            <a:pPr indent="0" marL="0">
+              <a:buNone/>
+            </a:pPr>
+            <a:r>
+              <a:rPr lang="en-US" sz="1600" b="1" dirty="0">
+                <a:solidFill>
+                  <a:srgbClr val="1A1A1A"/>
+                </a:solidFill>
+                <a:latin typeface="Arial" pitchFamily="34" charset="0"/>
+                <a:ea typeface="Arial" pitchFamily="34" charset="-122"/>
+                <a:cs typeface="Arial" pitchFamily="34" charset="-120"/>
+              </a:rPr>
+              <a:t>Contato do coordenador</a:t>
+            </a:r>
+            <a:endParaRPr lang="en-US" sz="1600" dirty="0"/>
+          </a:p>
+        </p:txBody>
+      </p:sp>
+      <p:sp>
+        <p:nvSpPr>
+          <p:cNvPr id="9" name="Text 7"/>
+          <p:cNvSpPr/>
+          <p:nvPr/>
+        </p:nvSpPr>
+        <p:spPr>
+          <a:xfrm>
+            <a:off x="457200" y="3959352"/>
+            <a:ext cx="6949440" cy="502920"/>
+          </a:xfrm>
+          <a:prstGeom prst="rect">
+            <a:avLst/>
+          </a:prstGeom>
+          <a:noFill/>
+          <a:ln/>
+        </p:spPr>
+        <p:txBody>
+          <a:bodyPr wrap="square" rtlCol="0" anchor="t">
+            <a:normAutofit/>
+          </a:bodyPr>
+          <a:lstStyle/>
+          <a:p>
+            <a:pPr indent="0" marL="0">
+              <a:buNone/>
+            </a:pPr>
+            <a:r>
+              <a:rPr lang="en-US" sz="1300" dirty="0">
+                <a:solidFill>
+                  <a:srgbClr val="4A4A4A"/>
+                </a:solidFill>
+                <a:latin typeface="Arial" pitchFamily="34" charset="0"/>
+                <a:ea typeface="Arial" pitchFamily="34" charset="-122"/>
+                <a:cs typeface="Arial" pitchFamily="34" charset="-120"/>
+              </a:rPr>
+              <a:t>Um Coordenador de Design de Logotipo dedicado coleta o briefing criativo — objetivos, estilo, cores, referências.</a:t>
+            </a:r>
+            <a:endParaRPr lang="en-US" sz="1300" dirty="0"/>
+          </a:p>
+        </p:txBody>
+      </p:sp>
+      <p:sp>
+        <p:nvSpPr>
+          <p:cNvPr id="10" name="Text 8"/>
+          <p:cNvSpPr/>
+          <p:nvPr/>
+        </p:nvSpPr>
+        <p:spPr>
+          <a:xfrm>
+            <a:off x="457200" y="4599432"/>
+            <a:ext cx="6949440" cy="502920"/>
+          </a:xfrm>
+          <a:prstGeom prst="rect">
+            <a:avLst/>
+          </a:prstGeom>
+          <a:noFill/>
+          <a:ln/>
+        </p:spPr>
+        <p:txBody>
+          <a:bodyPr wrap="square" rtlCol="0" anchor="t">
+            <a:normAutofit/>
+          </a:bodyPr>
+          <a:lstStyle/>
+          <a:p>
+            <a:pPr indent="0" marL="0">
+              <a:buNone/>
+            </a:pPr>
+            <a:r>
+              <a:rPr lang="en-US" sz="1600" b="1" dirty="0">
+                <a:solidFill>
+                  <a:srgbClr val="1A1A1A"/>
+                </a:solidFill>
+                <a:latin typeface="Arial" pitchFamily="34" charset="0"/>
+                <a:ea typeface="Arial" pitchFamily="34" charset="-122"/>
+                <a:cs typeface="Arial" pitchFamily="34" charset="-120"/>
+              </a:rPr>
+              <a:t>Conceitos iniciais</a:t>
+            </a:r>
+            <a:endParaRPr lang="en-US" sz="1600" dirty="0"/>
+          </a:p>
+        </p:txBody>
+      </p:sp>
+      <p:sp>
+        <p:nvSpPr>
+          <p:cNvPr id="11" name="Text 9"/>
+          <p:cNvSpPr/>
+          <p:nvPr/>
+        </p:nvSpPr>
+        <p:spPr>
+          <a:xfrm>
+            <a:off x="457200" y="5212080"/>
+            <a:ext cx="6949440" cy="502920"/>
+          </a:xfrm>
+          <a:prstGeom prst="rect">
+            <a:avLst/>
+          </a:prstGeom>
+          <a:noFill/>
+          <a:ln/>
+        </p:spPr>
+        <p:txBody>
+          <a:bodyPr wrap="square" rtlCol="0" anchor="t">
+            <a:normAutofit/>
+          </a:bodyPr>
+          <a:lstStyle/>
+          <a:p>
+            <a:pPr indent="0" marL="0">
+              <a:buNone/>
+            </a:pPr>
+            <a:r>
+              <a:rPr lang="en-US" sz="1300" dirty="0">
+                <a:solidFill>
+                  <a:srgbClr val="4A4A4A"/>
+                </a:solidFill>
+                <a:latin typeface="Arial" pitchFamily="34" charset="0"/>
+                <a:ea typeface="Arial" pitchFamily="34" charset="-122"/>
+                <a:cs typeface="Arial" pitchFamily="34" charset="-120"/>
+              </a:rPr>
+              <a:t>Designers internos entregam até dez conceitos personalizados com base no briefing.</a:t>
+            </a:r>
+            <a:endParaRPr lang="en-US" sz="1300" dirty="0"/>
+          </a:p>
+        </p:txBody>
+      </p:sp>
+      <p:sp>
+        <p:nvSpPr>
+          <p:cNvPr id="12" name="Text 10"/>
+          <p:cNvSpPr/>
+          <p:nvPr/>
+        </p:nvSpPr>
+        <p:spPr>
+          <a:xfrm>
+            <a:off x="457200" y="5852160"/>
+            <a:ext cx="6949440" cy="502920"/>
+          </a:xfrm>
+          <a:prstGeom prst="rect">
+            <a:avLst/>
+          </a:prstGeom>
+          <a:noFill/>
+          <a:ln/>
+        </p:spPr>
+        <p:txBody>
+          <a:bodyPr wrap="square" rtlCol="0" anchor="t">
+            <a:normAutofit/>
+          </a:bodyPr>
+          <a:lstStyle/>
+          <a:p>
+            <a:pPr indent="0" marL="0">
+              <a:buNone/>
+            </a:pPr>
+            <a:r>
+              <a:rPr lang="en-US" sz="1600" b="1" dirty="0">
+                <a:solidFill>
+                  <a:srgbClr val="1A1A1A"/>
+                </a:solidFill>
+                <a:latin typeface="Arial" pitchFamily="34" charset="0"/>
+                <a:ea typeface="Arial" pitchFamily="34" charset="-122"/>
+                <a:cs typeface="Arial" pitchFamily="34" charset="-120"/>
+              </a:rPr>
+              <a:t>Revisões</a:t>
+            </a:r>
+            <a:endParaRPr lang="en-US" sz="1600" dirty="0"/>
+          </a:p>
+        </p:txBody>
+      </p:sp>
       <p:pic>
         <p:nvPicPr>
-          <p:cNvPr id="4" name="Image 0" descr="preencoded.png">    </p:cNvPr>
+          <p:cNvPr id="13" name="Image 0" descr="preencoded.png">    </p:cNvPr>
           <p:cNvPicPr>
             <a:picLocks noChangeAspect="1"/>
           </p:cNvPicPr>
@@ -3326,8 +6435,8 @@
         </p:blipFill>
         <p:spPr>
           <a:xfrm>
-            <a:off x="7772400" y="1097280"/>
-            <a:ext cx="3657600" cy="2286000"/>
+            <a:off x="7680960" y="1005840"/>
+            <a:ext cx="3840480" cy="2560320"/>
           </a:xfrm>
           <a:prstGeom prst="rect">
             <a:avLst/>
@@ -3444,6 +6553,357 @@
           </a:p>
         </p:txBody>
       </p:sp>
+      <p:sp>
+        <p:nvSpPr>
+          <p:cNvPr id="4" name="Text 2"/>
+          <p:cNvSpPr/>
+          <p:nvPr/>
+        </p:nvSpPr>
+        <p:spPr>
+          <a:xfrm>
+            <a:off x="457200" y="868680"/>
+            <a:ext cx="10972800" cy="502920"/>
+          </a:xfrm>
+          <a:prstGeom prst="rect">
+            <a:avLst/>
+          </a:prstGeom>
+          <a:noFill/>
+          <a:ln/>
+        </p:spPr>
+        <p:txBody>
+          <a:bodyPr wrap="square" rtlCol="0" anchor="t">
+            <a:normAutofit/>
+          </a:bodyPr>
+          <a:lstStyle/>
+          <a:p>
+            <a:pPr indent="0" marL="0">
+              <a:buNone/>
+            </a:pPr>
+            <a:r>
+              <a:rPr lang="en-US" sz="2200" b="1" dirty="0">
+                <a:solidFill>
+                  <a:srgbClr val="1A1A1A"/>
+                </a:solidFill>
+                <a:latin typeface="Arial" pitchFamily="34" charset="0"/>
+                <a:ea typeface="Arial" pitchFamily="34" charset="-122"/>
+                <a:cs typeface="Arial" pitchFamily="34" charset="-120"/>
+              </a:rPr>
+              <a:t>Planos</a:t>
+            </a:r>
+            <a:endParaRPr lang="en-US" sz="2200" dirty="0"/>
+          </a:p>
+        </p:txBody>
+      </p:sp>
+      <p:sp>
+        <p:nvSpPr>
+          <p:cNvPr id="5" name="Text 3"/>
+          <p:cNvSpPr/>
+          <p:nvPr/>
+        </p:nvSpPr>
+        <p:spPr>
+          <a:xfrm>
+            <a:off x="457200" y="1481328"/>
+            <a:ext cx="10972800" cy="502920"/>
+          </a:xfrm>
+          <a:prstGeom prst="rect">
+            <a:avLst/>
+          </a:prstGeom>
+          <a:noFill/>
+          <a:ln/>
+        </p:spPr>
+        <p:txBody>
+          <a:bodyPr wrap="square" rtlCol="0" anchor="t">
+            <a:normAutofit/>
+          </a:bodyPr>
+          <a:lstStyle/>
+          <a:p>
+            <a:pPr indent="0" marL="0">
+              <a:buNone/>
+            </a:pPr>
+            <a:r>
+              <a:rPr lang="en-US" sz="2200" b="1" dirty="0">
+                <a:solidFill>
+                  <a:srgbClr val="1A1A1A"/>
+                </a:solidFill>
+                <a:latin typeface="Arial" pitchFamily="34" charset="0"/>
+                <a:ea typeface="Arial" pitchFamily="34" charset="-122"/>
+                <a:cs typeface="Arial" pitchFamily="34" charset="-120"/>
+              </a:rPr>
+              <a:t>Três níveis para cada orçamento.</a:t>
+            </a:r>
+            <a:endParaRPr lang="en-US" sz="2200" dirty="0"/>
+          </a:p>
+        </p:txBody>
+      </p:sp>
+      <p:sp>
+        <p:nvSpPr>
+          <p:cNvPr id="6" name="Text 4"/>
+          <p:cNvSpPr/>
+          <p:nvPr/>
+        </p:nvSpPr>
+        <p:spPr>
+          <a:xfrm>
+            <a:off x="457200" y="2093976"/>
+            <a:ext cx="10972800" cy="502920"/>
+          </a:xfrm>
+          <a:prstGeom prst="rect">
+            <a:avLst/>
+          </a:prstGeom>
+          <a:noFill/>
+          <a:ln/>
+        </p:spPr>
+        <p:txBody>
+          <a:bodyPr wrap="square" rtlCol="0" anchor="t">
+            <a:normAutofit/>
+          </a:bodyPr>
+          <a:lstStyle/>
+          <a:p>
+            <a:pPr indent="0" marL="0">
+              <a:buNone/>
+            </a:pPr>
+            <a:r>
+              <a:rPr lang="en-US" sz="1300" dirty="0">
+                <a:solidFill>
+                  <a:srgbClr val="4A4A4A"/>
+                </a:solidFill>
+                <a:latin typeface="Arial" pitchFamily="34" charset="0"/>
+                <a:ea typeface="Arial" pitchFamily="34" charset="-122"/>
+                <a:cs typeface="Arial" pitchFamily="34" charset="-120"/>
+              </a:rPr>
+              <a:t>Todos os planos incluem o Coordenador de Design de Logotipo, três rodadas de revisões, o pacote de arquivos em 11 formatos e a propriedade total do design final.</a:t>
+            </a:r>
+            <a:endParaRPr lang="en-US" sz="1300" dirty="0"/>
+          </a:p>
+        </p:txBody>
+      </p:sp>
+      <p:sp>
+        <p:nvSpPr>
+          <p:cNvPr id="7" name="Text 5"/>
+          <p:cNvSpPr/>
+          <p:nvPr/>
+        </p:nvSpPr>
+        <p:spPr>
+          <a:xfrm>
+            <a:off x="594360" y="2734056"/>
+            <a:ext cx="10789920" cy="1783080"/>
+          </a:xfrm>
+          <a:prstGeom prst="rect">
+            <a:avLst/>
+          </a:prstGeom>
+          <a:noFill/>
+          <a:ln/>
+        </p:spPr>
+        <p:txBody>
+          <a:bodyPr wrap="square" rtlCol="0" anchor="t">
+            <a:normAutofit/>
+          </a:bodyPr>
+          <a:lstStyle/>
+          <a:p>
+            <a:pPr marL="342900" indent="-342900">
+              <a:buSzPct val="100000"/>
+              <a:buChar char="•"/>
+            </a:pPr>
+            <a:r>
+              <a:rPr lang="en-US" sz="1200" dirty="0">
+                <a:solidFill>
+                  <a:srgbClr val="4A4A4A"/>
+                </a:solidFill>
+                <a:latin typeface="Arial" pitchFamily="34" charset="0"/>
+                <a:ea typeface="Arial" pitchFamily="34" charset="-122"/>
+                <a:cs typeface="Arial" pitchFamily="34" charset="-120"/>
+              </a:rPr>
+              <a:t>Coordenador de Design de Logotipo</a:t>
+            </a:r>
+            <a:endParaRPr lang="en-US" sz="1200" dirty="0"/>
+          </a:p>
+          <a:p>
+            <a:pPr marL="342900" indent="-342900">
+              <a:buSzPct val="100000"/>
+              <a:buChar char="•"/>
+            </a:pPr>
+            <a:r>
+              <a:rPr lang="en-US" sz="1200" dirty="0">
+                <a:solidFill>
+                  <a:srgbClr val="4A4A4A"/>
+                </a:solidFill>
+                <a:latin typeface="Arial" pitchFamily="34" charset="0"/>
+                <a:ea typeface="Arial" pitchFamily="34" charset="-122"/>
+                <a:cs typeface="Arial" pitchFamily="34" charset="-120"/>
+              </a:rPr>
+              <a:t>4 conceitos de design personalizados</a:t>
+            </a:r>
+            <a:endParaRPr lang="en-US" sz="1200" dirty="0"/>
+          </a:p>
+          <a:p>
+            <a:pPr marL="342900" indent="-342900">
+              <a:buSzPct val="100000"/>
+              <a:buChar char="•"/>
+            </a:pPr>
+            <a:r>
+              <a:rPr lang="en-US" sz="1200" dirty="0">
+                <a:solidFill>
+                  <a:srgbClr val="4A4A4A"/>
+                </a:solidFill>
+                <a:latin typeface="Arial" pitchFamily="34" charset="0"/>
+                <a:ea typeface="Arial" pitchFamily="34" charset="-122"/>
+                <a:cs typeface="Arial" pitchFamily="34" charset="-120"/>
+              </a:rPr>
+              <a:t>3 rodadas de revisões</a:t>
+            </a:r>
+            <a:endParaRPr lang="en-US" sz="1200" dirty="0"/>
+          </a:p>
+          <a:p>
+            <a:pPr marL="342900" indent="-342900">
+              <a:buSzPct val="100000"/>
+              <a:buChar char="•"/>
+            </a:pPr>
+            <a:r>
+              <a:rPr lang="en-US" sz="1200" dirty="0">
+                <a:solidFill>
+                  <a:srgbClr val="4A4A4A"/>
+                </a:solidFill>
+                <a:latin typeface="Arial" pitchFamily="34" charset="0"/>
+                <a:ea typeface="Arial" pitchFamily="34" charset="-122"/>
+                <a:cs typeface="Arial" pitchFamily="34" charset="-120"/>
+              </a:rPr>
+              <a:t>11 formatos de arquivo finais</a:t>
+            </a:r>
+            <a:endParaRPr lang="en-US" sz="1200" dirty="0"/>
+          </a:p>
+          <a:p>
+            <a:pPr marL="342900" indent="-342900">
+              <a:buSzPct val="100000"/>
+              <a:buChar char="•"/>
+            </a:pPr>
+            <a:r>
+              <a:rPr lang="en-US" sz="1200" dirty="0">
+                <a:solidFill>
+                  <a:srgbClr val="4A4A4A"/>
+                </a:solidFill>
+                <a:latin typeface="Arial" pitchFamily="34" charset="0"/>
+                <a:ea typeface="Arial" pitchFamily="34" charset="-122"/>
+                <a:cs typeface="Arial" pitchFamily="34" charset="-120"/>
+              </a:rPr>
+              <a:t>Propriedade total do design</a:t>
+            </a:r>
+            <a:endParaRPr lang="en-US" sz="1200" dirty="0"/>
+          </a:p>
+        </p:txBody>
+      </p:sp>
+      <p:sp>
+        <p:nvSpPr>
+          <p:cNvPr id="8" name="Text 6"/>
+          <p:cNvSpPr/>
+          <p:nvPr/>
+        </p:nvSpPr>
+        <p:spPr>
+          <a:xfrm>
+            <a:off x="594360" y="4654296"/>
+            <a:ext cx="10789920" cy="1783080"/>
+          </a:xfrm>
+          <a:prstGeom prst="rect">
+            <a:avLst/>
+          </a:prstGeom>
+          <a:noFill/>
+          <a:ln/>
+        </p:spPr>
+        <p:txBody>
+          <a:bodyPr wrap="square" rtlCol="0" anchor="t">
+            <a:normAutofit/>
+          </a:bodyPr>
+          <a:lstStyle/>
+          <a:p>
+            <a:pPr marL="342900" indent="-342900">
+              <a:buSzPct val="100000"/>
+              <a:buChar char="•"/>
+            </a:pPr>
+            <a:r>
+              <a:rPr lang="en-US" sz="1200" dirty="0">
+                <a:solidFill>
+                  <a:srgbClr val="4A4A4A"/>
+                </a:solidFill>
+                <a:latin typeface="Arial" pitchFamily="34" charset="0"/>
+                <a:ea typeface="Arial" pitchFamily="34" charset="-122"/>
+                <a:cs typeface="Arial" pitchFamily="34" charset="-120"/>
+              </a:rPr>
+              <a:t>Tudo do Bronze</a:t>
+            </a:r>
+            <a:endParaRPr lang="en-US" sz="1200" dirty="0"/>
+          </a:p>
+          <a:p>
+            <a:pPr marL="342900" indent="-342900">
+              <a:buSzPct val="100000"/>
+              <a:buChar char="•"/>
+            </a:pPr>
+            <a:r>
+              <a:rPr lang="en-US" sz="1200" dirty="0">
+                <a:solidFill>
+                  <a:srgbClr val="4A4A4A"/>
+                </a:solidFill>
+                <a:latin typeface="Arial" pitchFamily="34" charset="0"/>
+                <a:ea typeface="Arial" pitchFamily="34" charset="-122"/>
+                <a:cs typeface="Arial" pitchFamily="34" charset="-120"/>
+              </a:rPr>
+              <a:t>6 conceitos de design personalizados</a:t>
+            </a:r>
+            <a:endParaRPr lang="en-US" sz="1200" dirty="0"/>
+          </a:p>
+          <a:p>
+            <a:pPr marL="342900" indent="-342900">
+              <a:buSzPct val="100000"/>
+              <a:buChar char="•"/>
+            </a:pPr>
+            <a:r>
+              <a:rPr lang="en-US" sz="1200" dirty="0">
+                <a:solidFill>
+                  <a:srgbClr val="4A4A4A"/>
+                </a:solidFill>
+                <a:latin typeface="Arial" pitchFamily="34" charset="0"/>
+                <a:ea typeface="Arial" pitchFamily="34" charset="-122"/>
+                <a:cs typeface="Arial" pitchFamily="34" charset="-120"/>
+              </a:rPr>
+              <a:t>Design de cartão de visita</a:t>
+            </a:r>
+            <a:endParaRPr lang="en-US" sz="1200" dirty="0"/>
+          </a:p>
+          <a:p>
+            <a:pPr marL="342900" indent="-342900">
+              <a:buSzPct val="100000"/>
+              <a:buChar char="•"/>
+            </a:pPr>
+            <a:r>
+              <a:rPr lang="en-US" sz="1200" dirty="0">
+                <a:solidFill>
+                  <a:srgbClr val="4A4A4A"/>
+                </a:solidFill>
+                <a:latin typeface="Arial" pitchFamily="34" charset="0"/>
+                <a:ea typeface="Arial" pitchFamily="34" charset="-122"/>
+                <a:cs typeface="Arial" pitchFamily="34" charset="-120"/>
+              </a:rPr>
+              <a:t>Papel timbrado e envelope</a:t>
+            </a:r>
+            <a:endParaRPr lang="en-US" sz="1200" dirty="0"/>
+          </a:p>
+          <a:p>
+            <a:pPr marL="342900" indent="-342900">
+              <a:buSzPct val="100000"/>
+              <a:buChar char="•"/>
+            </a:pPr>
+            <a:r>
+              <a:rPr lang="en-US" sz="1200" dirty="0">
+                <a:solidFill>
+                  <a:srgbClr val="4A4A4A"/>
+                </a:solidFill>
+                <a:latin typeface="Arial" pitchFamily="34" charset="0"/>
+                <a:ea typeface="Arial" pitchFamily="34" charset="-122"/>
+                <a:cs typeface="Arial" pitchFamily="34" charset="-120"/>
+              </a:rPr>
+              <a:t>Direitos de papelaria incluídos</a:t>
+            </a:r>
+            <a:endParaRPr lang="en-US" sz="1200" dirty="0"/>
+          </a:p>
+        </p:txBody>
+      </p:sp>
     </p:spTree>
   </p:cSld>
   <p:clrMapOvr>
@@ -3551,6 +7011,129 @@
               <a:t>09 Discovery</a:t>
             </a:r>
             <a:endParaRPr lang="en-US" sz="1000" dirty="0"/>
+          </a:p>
+        </p:txBody>
+      </p:sp>
+      <p:sp>
+        <p:nvSpPr>
+          <p:cNvPr id="4" name="Text 2"/>
+          <p:cNvSpPr/>
+          <p:nvPr/>
+        </p:nvSpPr>
+        <p:spPr>
+          <a:xfrm>
+            <a:off x="457200" y="868680"/>
+            <a:ext cx="10972800" cy="502920"/>
+          </a:xfrm>
+          <a:prstGeom prst="rect">
+            <a:avLst/>
+          </a:prstGeom>
+          <a:noFill/>
+          <a:ln/>
+        </p:spPr>
+        <p:txBody>
+          <a:bodyPr wrap="square" rtlCol="0" anchor="t">
+            <a:normAutofit/>
+          </a:bodyPr>
+          <a:lstStyle/>
+          <a:p>
+            <a:pPr indent="0" marL="0">
+              <a:buNone/>
+            </a:pPr>
+            <a:r>
+              <a:rPr lang="en-US" sz="2200" b="1" dirty="0">
+                <a:solidFill>
+                  <a:srgbClr val="1A1A1A"/>
+                </a:solidFill>
+                <a:latin typeface="Arial" pitchFamily="34" charset="0"/>
+                <a:ea typeface="Arial" pitchFamily="34" charset="-122"/>
+                <a:cs typeface="Arial" pitchFamily="34" charset="-120"/>
+              </a:rPr>
+              <a:t>Descoberta</a:t>
+            </a:r>
+            <a:endParaRPr lang="en-US" sz="2200" dirty="0"/>
+          </a:p>
+        </p:txBody>
+      </p:sp>
+      <p:sp>
+        <p:nvSpPr>
+          <p:cNvPr id="5" name="Text 3"/>
+          <p:cNvSpPr/>
+          <p:nvPr/>
+        </p:nvSpPr>
+        <p:spPr>
+          <a:xfrm>
+            <a:off x="457200" y="1481328"/>
+            <a:ext cx="10972800" cy="502920"/>
+          </a:xfrm>
+          <a:prstGeom prst="rect">
+            <a:avLst/>
+          </a:prstGeom>
+          <a:noFill/>
+          <a:ln/>
+        </p:spPr>
+        <p:txBody>
+          <a:bodyPr wrap="square" rtlCol="0" anchor="t">
+            <a:normAutofit/>
+          </a:bodyPr>
+          <a:lstStyle/>
+          <a:p>
+            <a:pPr indent="0" marL="0">
+              <a:buNone/>
+            </a:pPr>
+            <a:r>
+              <a:rPr lang="en-US" sz="2200" b="1" dirty="0">
+                <a:solidFill>
+                  <a:srgbClr val="1A1A1A"/>
+                </a:solidFill>
+                <a:latin typeface="Arial" pitchFamily="34" charset="0"/>
+                <a:ea typeface="Arial" pitchFamily="34" charset="-122"/>
+                <a:cs typeface="Arial" pitchFamily="34" charset="-120"/>
+              </a:rPr>
+              <a:t>Perguntas para fazer na ligação.</a:t>
+            </a:r>
+            <a:endParaRPr lang="en-US" sz="2200" dirty="0"/>
+          </a:p>
+        </p:txBody>
+      </p:sp>
+      <p:sp>
+        <p:nvSpPr>
+          <p:cNvPr id="6" name="Text 4"/>
+          <p:cNvSpPr/>
+          <p:nvPr/>
+        </p:nvSpPr>
+        <p:spPr>
+          <a:xfrm>
+            <a:off x="457200" y="2093976"/>
+            <a:ext cx="10972800" cy="502920"/>
+          </a:xfrm>
+          <a:prstGeom prst="rect">
+            <a:avLst/>
+          </a:prstGeom>
+          <a:noFill/>
+          <a:ln/>
+        </p:spPr>
+        <p:txBody>
+          <a:bodyPr wrap="square" rtlCol="0" anchor="t">
+            <a:normAutofit/>
+          </a:bodyPr>
+          <a:lstStyle/>
+          <a:p>
+            <a:pPr indent="0" marL="0">
+              <a:buNone/>
+            </a:pPr>
+            <a:r>
+              <a:rPr lang="en-US" sz="1300" dirty="0">
+                <a:solidFill>
+                  <a:srgbClr val="4A4A4A"/>
+                </a:solidFill>
+                <a:latin typeface="Arial" pitchFamily="34" charset="0"/>
+                <a:ea typeface="Arial" pitchFamily="34" charset="-122"/>
+                <a:cs typeface="Arial" pitchFamily="34" charset="-120"/>
+              </a:rPr>
+              <a:t>Sete perguntas, em ordem. A primeira abre cada conversa. A última fecha a maioria delas.</a:t>
+            </a:r>
+            <a:endParaRPr lang="en-US" sz="1300" dirty="0"/>
           </a:p>
         </p:txBody>
       </p:sp>
